--- a/备选资产/结构图/鱼骨原因分析-001/example.pptx
+++ b/备选资产/结构图/鱼骨原因分析-001/example.pptx
@@ -2,13 +2,13 @@
 <file path=ppt/presentation.xml><?xml version="1.0" encoding="utf-8"?>
 <p:presentation xmlns:p="http://schemas.openxmlformats.org/presentationml/2006/main">
   <p:sldMasterIdLst>
-    <p:sldMasterId xmlns:r="http://schemas.openxmlformats.org/officeDocument/2006/relationships" id="2147483648" r:id="R9a68186e2f5040c3"/>
+    <p:sldMasterId xmlns:r="http://schemas.openxmlformats.org/officeDocument/2006/relationships" id="2147483648" r:id="R60c3e7311a4b4af0"/>
   </p:sldMasterIdLst>
   <p:notesMasterIdLst>
-    <p:notesMasterId xmlns:r="http://schemas.openxmlformats.org/officeDocument/2006/relationships" r:id="Rb70dc9e400a44f49"/>
+    <p:notesMasterId xmlns:r="http://schemas.openxmlformats.org/officeDocument/2006/relationships" r:id="R8b88881b49bc467f"/>
   </p:notesMasterIdLst>
   <p:sldIdLst>
-    <p:sldId xmlns:r="http://schemas.openxmlformats.org/officeDocument/2006/relationships" id="256" r:id="R1d6e69ccf6aa4cb2"/>
+    <p:sldId xmlns:r="http://schemas.openxmlformats.org/officeDocument/2006/relationships" id="256" r:id="R91fa69f8e385471a"/>
   </p:sldIdLst>
   <p:sldSz cx="12192000" cy="6858000"/>
   <p:notesSz cx="6858000" cy="9144000"/>
@@ -506,7 +506,7 @@
   </p:cSld>
   <p:clrMap bg1="lt1" tx1="dk1" bg2="lt2" tx2="dk2" accent1="accent1" accent2="accent2" accent3="accent3" accent4="accent4" accent5="accent5" accent6="accent6" hlink="hlink" folHlink="folHlink"/>
   <p:sldLayoutIdLst>
-    <p:sldLayoutId xmlns:r="http://schemas.openxmlformats.org/officeDocument/2006/relationships" id="2147483649" r:id="R545524dc98d940f9"/>
+    <p:sldLayoutId xmlns:r="http://schemas.openxmlformats.org/officeDocument/2006/relationships" id="2147483649" r:id="Rccdeda7644a8402a"/>
   </p:sldLayoutIdLst>
   <p:txStyles>
     <p:titleStyle>
@@ -1054,10 +1054,10 @@
       </p:grpSpPr>
       <p:sp>
         <p:nvSpPr>
-          <p:cNvPr id="30" name="">
-            <a:extLst xmlns:a="http://schemas.openxmlformats.org/drawingml/2006/main">
-              <a:ext uri="{FF2B5EF4-FFF2-40B4-BE49-F238E27FC236}">
-                <a16:creationId xmlns:a16="http://schemas.microsoft.com/office/drawing/2014/main" id="{3871BCF0-C488-47F2-A988-9CEECB7F10FE}"/>
+          <p:cNvPr id="41" name="">
+            <a:extLst xmlns:a="http://schemas.openxmlformats.org/drawingml/2006/main">
+              <a:ext uri="{FF2B5EF4-FFF2-40B4-BE49-F238E27FC236}">
+                <a16:creationId xmlns:a16="http://schemas.microsoft.com/office/drawing/2014/main" id="{81ADCB58-7724-4FE4-B837-E61DD2B2332A}"/>
               </a:ext>
             </a:extLst>
           </p:cNvPr>
@@ -1115,7 +1115,7 @@
           <p:cNvPr id="2" name="">
             <a:extLst xmlns:a="http://schemas.openxmlformats.org/drawingml/2006/main">
               <a:ext uri="{FF2B5EF4-FFF2-40B4-BE49-F238E27FC236}">
-                <a16:creationId xmlns:a16="http://schemas.microsoft.com/office/drawing/2014/main" id="{AC55257F-901A-46A0-B297-A946CBF02F8F}"/>
+                <a16:creationId xmlns:a16="http://schemas.microsoft.com/office/drawing/2014/main" id="{309C15D4-B08F-48F7-8396-E18E5B19A808}"/>
               </a:ext>
             </a:extLst>
           </p:cNvPr>
@@ -1163,7 +1163,7 @@
                 <a:ea typeface="Microsoft YaHei"/>
                 <a:cs typeface="Microsoft YaHei"/>
               </a:rPr>
-              <a:t>鱼骨原因分析</a:t>
+              <a:t>结果问题 · 分类原因拆解</a:t>
             </a:r>
           </a:p>
         </p:txBody>
@@ -1173,25 +1173,25 @@
           <p:cNvPr id="3" name="">
             <a:extLst xmlns:a="http://schemas.openxmlformats.org/drawingml/2006/main">
               <a:ext uri="{FF2B5EF4-FFF2-40B4-BE49-F238E27FC236}">
-                <a16:creationId xmlns:a16="http://schemas.microsoft.com/office/drawing/2014/main" id="{4E0C405D-0F3E-4A75-BA1E-DD1C5CC6C297}"/>
-              </a:ext>
-            </a:extLst>
-          </p:cNvPr>
-          <p:cNvSpPr>
-            <a:spLocks xmlns:a="http://schemas.openxmlformats.org/drawingml/2006/main" noGrp="1"/>
-          </p:cNvSpPr>
-          <p:nvPr/>
-        </p:nvSpPr>
-        <p:spPr>
-          <a:xfrm xmlns:a="http://schemas.openxmlformats.org/drawingml/2006/main">
-            <a:off x="1200150" y="3476625"/>
-            <a:ext cx="8248650" cy="0"/>
+                <a16:creationId xmlns:a16="http://schemas.microsoft.com/office/drawing/2014/main" id="{98C21E5B-1BDC-4F5F-8705-F8FB93CC753E}"/>
+              </a:ext>
+            </a:extLst>
+          </p:cNvPr>
+          <p:cNvSpPr>
+            <a:spLocks xmlns:a="http://schemas.openxmlformats.org/drawingml/2006/main" noGrp="1"/>
+          </p:cNvSpPr>
+          <p:nvPr/>
+        </p:nvSpPr>
+        <p:spPr>
+          <a:xfrm xmlns:a="http://schemas.openxmlformats.org/drawingml/2006/main" flipH="0" flipV="0">
+            <a:off x="685800" y="3562350"/>
+            <a:ext cx="8705850" cy="0"/>
           </a:xfrm>
           <a:prstGeom xmlns:a="http://schemas.openxmlformats.org/drawingml/2006/main" prst="line">
             <a:avLst/>
           </a:prstGeom>
           <a:noFill xmlns:a="http://schemas.openxmlformats.org/drawingml/2006/main"/>
-          <a:ln xmlns:a="http://schemas.openxmlformats.org/drawingml/2006/main" w="47625">
+          <a:ln xmlns:a="http://schemas.openxmlformats.org/drawingml/2006/main" w="57150">
             <a:solidFill>
               <a:srgbClr val="1677C8"/>
             </a:solidFill>
@@ -1201,10 +1201,10 @@
       </p:sp>
       <p:sp>
         <p:nvSpPr>
-          <p:cNvPr id="4" name="">
-            <a:extLst xmlns:a="http://schemas.openxmlformats.org/drawingml/2006/main">
-              <a:ext uri="{FF2B5EF4-FFF2-40B4-BE49-F238E27FC236}">
-                <a16:creationId xmlns:a16="http://schemas.microsoft.com/office/drawing/2014/main" id="{CFD279BF-454C-425A-A921-D4F4AD0FB94F}"/>
+          <p:cNvPr id="4" name="PPAGENT_QA|parent=fishbone-effect">
+            <a:extLst xmlns:a="http://schemas.openxmlformats.org/drawingml/2006/main">
+              <a:ext uri="{FF2B5EF4-FFF2-40B4-BE49-F238E27FC236}">
+                <a16:creationId xmlns:a16="http://schemas.microsoft.com/office/drawing/2014/main" id="{8119AA59-BAC1-404A-8E64-E2E1C7B15B4E}"/>
               </a:ext>
             </a:extLst>
           </p:cNvPr>
@@ -1215,41 +1215,8 @@
         </p:nvSpPr>
         <p:spPr>
           <a:xfrm xmlns:a="http://schemas.openxmlformats.org/drawingml/2006/main">
-            <a:off x="990600" y="3314700"/>
-            <a:ext cx="323850" cy="323850"/>
-          </a:xfrm>
-          <a:prstGeom xmlns:a="http://schemas.openxmlformats.org/drawingml/2006/main" prst="ellipse">
-            <a:avLst/>
-          </a:prstGeom>
-          <a:solidFill xmlns:a="http://schemas.openxmlformats.org/drawingml/2006/main">
-            <a:srgbClr val="1677C8"/>
-          </a:solidFill>
-          <a:ln xmlns:a="http://schemas.openxmlformats.org/drawingml/2006/main" w="28575">
-            <a:solidFill>
-              <a:srgbClr val="FFFFFF"/>
-            </a:solidFill>
-            <a:prstDash val="solid"/>
-          </a:ln>
-        </p:spPr>
-      </p:sp>
-      <p:sp>
-        <p:nvSpPr>
-          <p:cNvPr id="5" name="">
-            <a:extLst xmlns:a="http://schemas.openxmlformats.org/drawingml/2006/main">
-              <a:ext uri="{FF2B5EF4-FFF2-40B4-BE49-F238E27FC236}">
-                <a16:creationId xmlns:a16="http://schemas.microsoft.com/office/drawing/2014/main" id="{7BAA51EE-87D8-4BD4-B0CF-CBFF1A71A3E1}"/>
-              </a:ext>
-            </a:extLst>
-          </p:cNvPr>
-          <p:cNvSpPr>
-            <a:spLocks xmlns:a="http://schemas.openxmlformats.org/drawingml/2006/main" noGrp="1"/>
-          </p:cNvSpPr>
-          <p:nvPr/>
-        </p:nvSpPr>
-        <p:spPr>
-          <a:xfrm xmlns:a="http://schemas.openxmlformats.org/drawingml/2006/main">
-            <a:off x="9239250" y="2943225"/>
-            <a:ext cx="2362200" cy="1066800"/>
+            <a:off x="9391650" y="3028950"/>
+            <a:ext cx="2381250" cy="1066800"/>
           </a:xfrm>
           <a:prstGeom xmlns:a="http://schemas.openxmlformats.org/drawingml/2006/main" prst="rightArrow">
             <a:avLst/>
@@ -1300,22 +1267,22 @@
       </p:sp>
       <p:sp>
         <p:nvSpPr>
-          <p:cNvPr id="6" name="">
-            <a:extLst xmlns:a="http://schemas.openxmlformats.org/drawingml/2006/main">
-              <a:ext uri="{FF2B5EF4-FFF2-40B4-BE49-F238E27FC236}">
-                <a16:creationId xmlns:a16="http://schemas.microsoft.com/office/drawing/2014/main" id="{B6F7D713-769F-43B5-BEFA-F4DCF2540B97}"/>
-              </a:ext>
-            </a:extLst>
-          </p:cNvPr>
-          <p:cNvSpPr>
-            <a:spLocks xmlns:a="http://schemas.openxmlformats.org/drawingml/2006/main" noGrp="1"/>
-          </p:cNvSpPr>
-          <p:nvPr/>
-        </p:nvSpPr>
-        <p:spPr>
-          <a:xfrm xmlns:a="http://schemas.openxmlformats.org/drawingml/2006/main" flipV="0">
-            <a:off x="2266950" y="2724150"/>
-            <a:ext cx="876300" cy="752475"/>
+          <p:cNvPr id="5" name="PPAGENT_CONNECTOR|from=fishbone-item-0-2|fromSide=bottom|to=fishbone-joint-0|toSide=center">
+            <a:extLst xmlns:a="http://schemas.openxmlformats.org/drawingml/2006/main">
+              <a:ext uri="{FF2B5EF4-FFF2-40B4-BE49-F238E27FC236}">
+                <a16:creationId xmlns:a16="http://schemas.microsoft.com/office/drawing/2014/main" id="{B802E44A-A4F3-48E6-812D-B0644ADD4B53}"/>
+              </a:ext>
+            </a:extLst>
+          </p:cNvPr>
+          <p:cNvSpPr>
+            <a:spLocks xmlns:a="http://schemas.openxmlformats.org/drawingml/2006/main" noGrp="1"/>
+          </p:cNvSpPr>
+          <p:nvPr/>
+        </p:nvSpPr>
+        <p:spPr>
+          <a:xfrm xmlns:a="http://schemas.openxmlformats.org/drawingml/2006/main" flipH="0" flipV="0">
+            <a:off x="2209800" y="3067050"/>
+            <a:ext cx="742950" cy="495300"/>
           </a:xfrm>
           <a:prstGeom xmlns:a="http://schemas.openxmlformats.org/drawingml/2006/main" prst="line">
             <a:avLst/>
@@ -1331,10 +1298,10 @@
       </p:sp>
       <p:sp>
         <p:nvSpPr>
-          <p:cNvPr id="7" name="">
-            <a:extLst xmlns:a="http://schemas.openxmlformats.org/drawingml/2006/main">
-              <a:ext uri="{FF2B5EF4-FFF2-40B4-BE49-F238E27FC236}">
-                <a16:creationId xmlns:a16="http://schemas.microsoft.com/office/drawing/2014/main" id="{8744A2BE-FB66-4982-8A80-ABA1A2040455}"/>
+          <p:cNvPr id="6" name="PPAGENT_QA|parent=fishbone-joint-0">
+            <a:extLst xmlns:a="http://schemas.openxmlformats.org/drawingml/2006/main">
+              <a:ext uri="{FF2B5EF4-FFF2-40B4-BE49-F238E27FC236}">
+                <a16:creationId xmlns:a16="http://schemas.microsoft.com/office/drawing/2014/main" id="{1325895D-372C-494F-8031-5EABCC349BAD}"/>
               </a:ext>
             </a:extLst>
           </p:cNvPr>
@@ -1345,37 +1312,29 @@
         </p:nvSpPr>
         <p:spPr>
           <a:xfrm xmlns:a="http://schemas.openxmlformats.org/drawingml/2006/main">
-            <a:off x="1333500" y="1333500"/>
-            <a:ext cx="2343150" cy="1428750"/>
-          </a:xfrm>
-          <a:prstGeom xmlns:a="http://schemas.openxmlformats.org/drawingml/2006/main" prst="roundRect">
-            <a:avLst>
-              <a:gd name="adj" fmla="val 8000"/>
-            </a:avLst>
+            <a:off x="2876550" y="3486150"/>
+            <a:ext cx="152400" cy="152400"/>
+          </a:xfrm>
+          <a:prstGeom xmlns:a="http://schemas.openxmlformats.org/drawingml/2006/main" prst="ellipse">
+            <a:avLst/>
           </a:prstGeom>
           <a:solidFill xmlns:a="http://schemas.openxmlformats.org/drawingml/2006/main">
             <a:srgbClr val="FFFFFF"/>
           </a:solidFill>
-          <a:ln xmlns:a="http://schemas.openxmlformats.org/drawingml/2006/main" w="14288">
+          <a:ln xmlns:a="http://schemas.openxmlformats.org/drawingml/2006/main" w="19050">
             <a:solidFill>
               <a:srgbClr val="00A8D8"/>
             </a:solidFill>
             <a:prstDash val="solid"/>
           </a:ln>
         </p:spPr>
-        <p:style>
-          <a:lnRef xmlns:a="http://schemas.openxmlformats.org/drawingml/2006/main" idx="0"/>
-          <a:fillRef xmlns:a="http://schemas.openxmlformats.org/drawingml/2006/main" idx="0"/>
-          <a:effectRef xmlns:a="http://schemas.openxmlformats.org/drawingml/2006/main" idx="4"/>
-          <a:fontRef xmlns:a="http://schemas.openxmlformats.org/drawingml/2006/main" idx="major"/>
-        </p:style>
-      </p:sp>
-      <p:sp>
-        <p:nvSpPr>
-          <p:cNvPr id="8" name="">
-            <a:extLst xmlns:a="http://schemas.openxmlformats.org/drawingml/2006/main">
-              <a:ext uri="{FF2B5EF4-FFF2-40B4-BE49-F238E27FC236}">
-                <a16:creationId xmlns:a16="http://schemas.microsoft.com/office/drawing/2014/main" id="{7D93570B-BEBC-4483-A997-B229489A603E}"/>
+      </p:sp>
+      <p:sp>
+        <p:nvSpPr>
+          <p:cNvPr id="7" name="">
+            <a:extLst xmlns:a="http://schemas.openxmlformats.org/drawingml/2006/main">
+              <a:ext uri="{FF2B5EF4-FFF2-40B4-BE49-F238E27FC236}">
+                <a16:creationId xmlns:a16="http://schemas.microsoft.com/office/drawing/2014/main" id="{4BBF1D01-D8ED-42C0-BF3A-A8BF3EDF7613}"/>
               </a:ext>
             </a:extLst>
           </p:cNvPr>
@@ -1386,32 +1345,28 @@
         </p:nvSpPr>
         <p:spPr>
           <a:xfrm xmlns:a="http://schemas.openxmlformats.org/drawingml/2006/main">
-            <a:off x="1333500" y="1333500"/>
-            <a:ext cx="2343150" cy="419100"/>
-          </a:xfrm>
-          <a:prstGeom xmlns:a="http://schemas.openxmlformats.org/drawingml/2006/main" prst="roundRect">
-            <a:avLst>
-              <a:gd name="adj" fmla="val 27273"/>
-            </a:avLst>
-          </a:prstGeom>
-          <a:solidFill xmlns:a="http://schemas.openxmlformats.org/drawingml/2006/main">
-            <a:srgbClr val="1677C8"/>
-          </a:solidFill>
+            <a:off x="1257300" y="1809750"/>
+            <a:ext cx="2095500" cy="285750"/>
+          </a:xfrm>
+          <a:prstGeom xmlns:a="http://schemas.openxmlformats.org/drawingml/2006/main" prst="rect">
+            <a:avLst/>
+          </a:prstGeom>
+          <a:noFill xmlns:a="http://schemas.openxmlformats.org/drawingml/2006/main"/>
           <a:ln xmlns:a="http://schemas.openxmlformats.org/drawingml/2006/main" w="0">
             <a:noFill/>
             <a:prstDash val="solid"/>
           </a:ln>
         </p:spPr>
         <p:txBody>
-          <a:bodyPr xmlns:a="http://schemas.openxmlformats.org/drawingml/2006/main" lIns="114300" tIns="76200" rIns="114300" bIns="76200" anchor="ctr">
-            <a:normAutofit fontScale="97086"/>
+          <a:bodyPr xmlns:a="http://schemas.openxmlformats.org/drawingml/2006/main" lIns="0" tIns="0" rIns="0" bIns="0" anchor="ctr">
+            <a:normAutofit fontScale="100000"/>
           </a:bodyPr>
           <a:lstStyle xmlns:a="http://schemas.openxmlformats.org/drawingml/2006/main"/>
           <a:p xmlns:a="http://schemas.openxmlformats.org/drawingml/2006/main">
-            <a:pPr algn="l">
+            <a:pPr algn="ctr">
               <a:defRPr sz="1350" b="1">
                 <a:solidFill>
-                  <a:srgbClr val="FFFFFF"/>
+                  <a:srgbClr val="1677C8"/>
                 </a:solidFill>
                 <a:latin typeface="Microsoft YaHei"/>
                 <a:ea typeface="Microsoft YaHei"/>
@@ -1421,7 +1376,7 @@
             <a:r>
               <a:rPr sz="1350" b="1">
                 <a:solidFill>
-                  <a:srgbClr val="FFFFFF"/>
+                  <a:srgbClr val="1677C8"/>
                 </a:solidFill>
                 <a:latin typeface="Microsoft YaHei"/>
                 <a:ea typeface="Microsoft YaHei"/>
@@ -1434,10 +1389,10 @@
       </p:sp>
       <p:sp>
         <p:nvSpPr>
-          <p:cNvPr id="9" name="">
-            <a:extLst xmlns:a="http://schemas.openxmlformats.org/drawingml/2006/main">
-              <a:ext uri="{FF2B5EF4-FFF2-40B4-BE49-F238E27FC236}">
-                <a16:creationId xmlns:a16="http://schemas.microsoft.com/office/drawing/2014/main" id="{0B67B63D-B6A4-435C-929B-96442053C8D8}"/>
+          <p:cNvPr id="8" name="PPAGENT_QA|parent=fishbone-item-0-0|domains=fishbone-items">
+            <a:extLst xmlns:a="http://schemas.openxmlformats.org/drawingml/2006/main">
+              <a:ext uri="{FF2B5EF4-FFF2-40B4-BE49-F238E27FC236}">
+                <a16:creationId xmlns:a16="http://schemas.microsoft.com/office/drawing/2014/main" id="{5E854EE4-BC5C-4939-BDB8-A808ED68FBAD}"/>
               </a:ext>
             </a:extLst>
           </p:cNvPr>
@@ -1448,26 +1403,30 @@
         </p:nvSpPr>
         <p:spPr>
           <a:xfrm xmlns:a="http://schemas.openxmlformats.org/drawingml/2006/main">
-            <a:off x="1504950" y="1866900"/>
-            <a:ext cx="2000250" cy="742950"/>
-          </a:xfrm>
-          <a:prstGeom xmlns:a="http://schemas.openxmlformats.org/drawingml/2006/main" prst="rect">
-            <a:avLst/>
-          </a:prstGeom>
-          <a:noFill xmlns:a="http://schemas.openxmlformats.org/drawingml/2006/main"/>
-          <a:ln xmlns:a="http://schemas.openxmlformats.org/drawingml/2006/main" w="0">
-            <a:noFill/>
-            <a:prstDash val="solid"/>
-          </a:ln>
-        </p:spPr>
-        <p:txBody>
-          <a:bodyPr xmlns:a="http://schemas.openxmlformats.org/drawingml/2006/main" lIns="0" tIns="0" rIns="0" bIns="0" anchor="t">
+            <a:off x="1314450" y="2190750"/>
+            <a:ext cx="2019300" cy="266700"/>
+          </a:xfrm>
+          <a:prstGeom xmlns:a="http://schemas.openxmlformats.org/drawingml/2006/main" prst="parallelogram">
+            <a:avLst/>
+          </a:prstGeom>
+          <a:solidFill xmlns:a="http://schemas.openxmlformats.org/drawingml/2006/main">
+            <a:srgbClr val="F0F5FA"/>
+          </a:solidFill>
+          <a:ln xmlns:a="http://schemas.openxmlformats.org/drawingml/2006/main" w="9525">
+            <a:solidFill>
+              <a:srgbClr val="B8CCE0"/>
+            </a:solidFill>
+            <a:prstDash val="solid"/>
+          </a:ln>
+        </p:spPr>
+        <p:txBody>
+          <a:bodyPr xmlns:a="http://schemas.openxmlformats.org/drawingml/2006/main" lIns="114300" tIns="9525" rIns="114300" bIns="9525" anchor="ctr">
             <a:normAutofit fontScale="100000"/>
           </a:bodyPr>
           <a:lstStyle xmlns:a="http://schemas.openxmlformats.org/drawingml/2006/main"/>
           <a:p xmlns:a="http://schemas.openxmlformats.org/drawingml/2006/main">
-            <a:pPr algn="l">
-              <a:defRPr sz="1125" b="0">
+            <a:pPr algn="ctr">
+              <a:defRPr sz="1200" b="0">
                 <a:solidFill>
                   <a:srgbClr val="475569"/>
                 </a:solidFill>
@@ -1477,7 +1436,7 @@
               </a:defRPr>
             </a:pPr>
             <a:r>
-              <a:rPr sz="1125" b="0">
+              <a:rPr sz="1200" b="0">
                 <a:solidFill>
                   <a:srgbClr val="475569"/>
                 </a:solidFill>
@@ -1485,12 +1444,51 @@
                 <a:ea typeface="Microsoft YaHei"/>
                 <a:cs typeface="Microsoft YaHei"/>
               </a:rPr>
-              <a:t>• 关键岗位不足</a:t>
+              <a:t>关键岗位不足</a:t>
             </a:r>
           </a:p>
+        </p:txBody>
+      </p:sp>
+      <p:sp>
+        <p:nvSpPr>
+          <p:cNvPr id="9" name="PPAGENT_QA|parent=fishbone-item-0-1|domains=fishbone-items">
+            <a:extLst xmlns:a="http://schemas.openxmlformats.org/drawingml/2006/main">
+              <a:ext uri="{FF2B5EF4-FFF2-40B4-BE49-F238E27FC236}">
+                <a16:creationId xmlns:a16="http://schemas.microsoft.com/office/drawing/2014/main" id="{4D3E7F8C-4285-48FE-8D6D-47DEA799D2BE}"/>
+              </a:ext>
+            </a:extLst>
+          </p:cNvPr>
+          <p:cNvSpPr>
+            <a:spLocks xmlns:a="http://schemas.openxmlformats.org/drawingml/2006/main" noGrp="1"/>
+          </p:cNvSpPr>
+          <p:nvPr/>
+        </p:nvSpPr>
+        <p:spPr>
+          <a:xfrm xmlns:a="http://schemas.openxmlformats.org/drawingml/2006/main">
+            <a:off x="1257300" y="2495550"/>
+            <a:ext cx="2019300" cy="266700"/>
+          </a:xfrm>
+          <a:prstGeom xmlns:a="http://schemas.openxmlformats.org/drawingml/2006/main" prst="parallelogram">
+            <a:avLst/>
+          </a:prstGeom>
+          <a:solidFill xmlns:a="http://schemas.openxmlformats.org/drawingml/2006/main">
+            <a:srgbClr val="F0F5FA"/>
+          </a:solidFill>
+          <a:ln xmlns:a="http://schemas.openxmlformats.org/drawingml/2006/main" w="9525">
+            <a:solidFill>
+              <a:srgbClr val="B8CCE0"/>
+            </a:solidFill>
+            <a:prstDash val="solid"/>
+          </a:ln>
+        </p:spPr>
+        <p:txBody>
+          <a:bodyPr xmlns:a="http://schemas.openxmlformats.org/drawingml/2006/main" lIns="114300" tIns="9525" rIns="114300" bIns="9525" anchor="ctr">
+            <a:normAutofit fontScale="100000"/>
+          </a:bodyPr>
+          <a:lstStyle xmlns:a="http://schemas.openxmlformats.org/drawingml/2006/main"/>
           <a:p xmlns:a="http://schemas.openxmlformats.org/drawingml/2006/main">
-            <a:pPr algn="l">
-              <a:defRPr sz="1125" b="0">
+            <a:pPr algn="ctr">
+              <a:defRPr sz="1200" b="0">
                 <a:solidFill>
                   <a:srgbClr val="475569"/>
                 </a:solidFill>
@@ -1500,7 +1498,7 @@
               </a:defRPr>
             </a:pPr>
             <a:r>
-              <a:rPr sz="1125" b="0">
+              <a:rPr sz="1200" b="0">
                 <a:solidFill>
                   <a:srgbClr val="475569"/>
                 </a:solidFill>
@@ -1508,12 +1506,51 @@
                 <a:ea typeface="Microsoft YaHei"/>
                 <a:cs typeface="Microsoft YaHei"/>
               </a:rPr>
-              <a:t>• 协同边界不清</a:t>
+              <a:t>协同边界不清</a:t>
             </a:r>
           </a:p>
+        </p:txBody>
+      </p:sp>
+      <p:sp>
+        <p:nvSpPr>
+          <p:cNvPr id="10" name="PPAGENT_QA|parent=fishbone-item-0-2|domains=fishbone-items">
+            <a:extLst xmlns:a="http://schemas.openxmlformats.org/drawingml/2006/main">
+              <a:ext uri="{FF2B5EF4-FFF2-40B4-BE49-F238E27FC236}">
+                <a16:creationId xmlns:a16="http://schemas.microsoft.com/office/drawing/2014/main" id="{6CF913B9-480F-4716-86A6-505CCBDCAA3F}"/>
+              </a:ext>
+            </a:extLst>
+          </p:cNvPr>
+          <p:cNvSpPr>
+            <a:spLocks xmlns:a="http://schemas.openxmlformats.org/drawingml/2006/main" noGrp="1"/>
+          </p:cNvSpPr>
+          <p:nvPr/>
+        </p:nvSpPr>
+        <p:spPr>
+          <a:xfrm xmlns:a="http://schemas.openxmlformats.org/drawingml/2006/main">
+            <a:off x="1200150" y="2800350"/>
+            <a:ext cx="2019300" cy="266700"/>
+          </a:xfrm>
+          <a:prstGeom xmlns:a="http://schemas.openxmlformats.org/drawingml/2006/main" prst="parallelogram">
+            <a:avLst/>
+          </a:prstGeom>
+          <a:solidFill xmlns:a="http://schemas.openxmlformats.org/drawingml/2006/main">
+            <a:srgbClr val="F0F5FA"/>
+          </a:solidFill>
+          <a:ln xmlns:a="http://schemas.openxmlformats.org/drawingml/2006/main" w="9525">
+            <a:solidFill>
+              <a:srgbClr val="B8CCE0"/>
+            </a:solidFill>
+            <a:prstDash val="solid"/>
+          </a:ln>
+        </p:spPr>
+        <p:txBody>
+          <a:bodyPr xmlns:a="http://schemas.openxmlformats.org/drawingml/2006/main" lIns="114300" tIns="9525" rIns="114300" bIns="9525" anchor="ctr">
+            <a:normAutofit fontScale="100000"/>
+          </a:bodyPr>
+          <a:lstStyle xmlns:a="http://schemas.openxmlformats.org/drawingml/2006/main"/>
           <a:p xmlns:a="http://schemas.openxmlformats.org/drawingml/2006/main">
-            <a:pPr algn="l">
-              <a:defRPr sz="1125" b="0">
+            <a:pPr algn="ctr">
+              <a:defRPr sz="1200" b="0">
                 <a:solidFill>
                   <a:srgbClr val="475569"/>
                 </a:solidFill>
@@ -1523,7 +1560,7 @@
               </a:defRPr>
             </a:pPr>
             <a:r>
-              <a:rPr sz="1125" b="0">
+              <a:rPr sz="1200" b="0">
                 <a:solidFill>
                   <a:srgbClr val="475569"/>
                 </a:solidFill>
@@ -1531,29 +1568,29 @@
                 <a:ea typeface="Microsoft YaHei"/>
                 <a:cs typeface="Microsoft YaHei"/>
               </a:rPr>
-              <a:t>• 经验不匹配</a:t>
+              <a:t>经验不匹配</a:t>
             </a:r>
           </a:p>
         </p:txBody>
       </p:sp>
       <p:sp>
         <p:nvSpPr>
-          <p:cNvPr id="10" name="">
-            <a:extLst xmlns:a="http://schemas.openxmlformats.org/drawingml/2006/main">
-              <a:ext uri="{FF2B5EF4-FFF2-40B4-BE49-F238E27FC236}">
-                <a16:creationId xmlns:a16="http://schemas.microsoft.com/office/drawing/2014/main" id="{C491B552-F0C6-4408-80D6-D94B49B0B30E}"/>
-              </a:ext>
-            </a:extLst>
-          </p:cNvPr>
-          <p:cNvSpPr>
-            <a:spLocks xmlns:a="http://schemas.openxmlformats.org/drawingml/2006/main" noGrp="1"/>
-          </p:cNvSpPr>
-          <p:nvPr/>
-        </p:nvSpPr>
-        <p:spPr>
-          <a:xfrm xmlns:a="http://schemas.openxmlformats.org/drawingml/2006/main" flipV="0">
-            <a:off x="4981575" y="2724150"/>
-            <a:ext cx="876300" cy="752475"/>
+          <p:cNvPr id="11" name="PPAGENT_CONNECTOR|from=fishbone-item-2-2|fromSide=bottom|to=fishbone-joint-2|toSide=center">
+            <a:extLst xmlns:a="http://schemas.openxmlformats.org/drawingml/2006/main">
+              <a:ext uri="{FF2B5EF4-FFF2-40B4-BE49-F238E27FC236}">
+                <a16:creationId xmlns:a16="http://schemas.microsoft.com/office/drawing/2014/main" id="{70ED13F4-5400-4C43-9475-51AB5A59DD4F}"/>
+              </a:ext>
+            </a:extLst>
+          </p:cNvPr>
+          <p:cNvSpPr>
+            <a:spLocks xmlns:a="http://schemas.openxmlformats.org/drawingml/2006/main" noGrp="1"/>
+          </p:cNvSpPr>
+          <p:nvPr/>
+        </p:nvSpPr>
+        <p:spPr>
+          <a:xfrm xmlns:a="http://schemas.openxmlformats.org/drawingml/2006/main" flipH="0" flipV="0">
+            <a:off x="4876800" y="3067050"/>
+            <a:ext cx="742950" cy="495300"/>
           </a:xfrm>
           <a:prstGeom xmlns:a="http://schemas.openxmlformats.org/drawingml/2006/main" prst="line">
             <a:avLst/>
@@ -1569,10 +1606,10 @@
       </p:sp>
       <p:sp>
         <p:nvSpPr>
-          <p:cNvPr id="11" name="">
-            <a:extLst xmlns:a="http://schemas.openxmlformats.org/drawingml/2006/main">
-              <a:ext uri="{FF2B5EF4-FFF2-40B4-BE49-F238E27FC236}">
-                <a16:creationId xmlns:a16="http://schemas.microsoft.com/office/drawing/2014/main" id="{6B9B0B11-02D4-4F84-BE4A-B4BE9E7ACBD3}"/>
+          <p:cNvPr id="12" name="PPAGENT_QA|parent=fishbone-joint-2">
+            <a:extLst xmlns:a="http://schemas.openxmlformats.org/drawingml/2006/main">
+              <a:ext uri="{FF2B5EF4-FFF2-40B4-BE49-F238E27FC236}">
+                <a16:creationId xmlns:a16="http://schemas.microsoft.com/office/drawing/2014/main" id="{5C429696-92E7-4D43-AEEB-DC56EF612C54}"/>
               </a:ext>
             </a:extLst>
           </p:cNvPr>
@@ -1583,37 +1620,29 @@
         </p:nvSpPr>
         <p:spPr>
           <a:xfrm xmlns:a="http://schemas.openxmlformats.org/drawingml/2006/main">
-            <a:off x="4048125" y="1333500"/>
-            <a:ext cx="2343150" cy="1428750"/>
-          </a:xfrm>
-          <a:prstGeom xmlns:a="http://schemas.openxmlformats.org/drawingml/2006/main" prst="roundRect">
-            <a:avLst>
-              <a:gd name="adj" fmla="val 8000"/>
-            </a:avLst>
+            <a:off x="5543550" y="3486150"/>
+            <a:ext cx="152400" cy="152400"/>
+          </a:xfrm>
+          <a:prstGeom xmlns:a="http://schemas.openxmlformats.org/drawingml/2006/main" prst="ellipse">
+            <a:avLst/>
           </a:prstGeom>
           <a:solidFill xmlns:a="http://schemas.openxmlformats.org/drawingml/2006/main">
             <a:srgbClr val="FFFFFF"/>
           </a:solidFill>
-          <a:ln xmlns:a="http://schemas.openxmlformats.org/drawingml/2006/main" w="14288">
+          <a:ln xmlns:a="http://schemas.openxmlformats.org/drawingml/2006/main" w="19050">
             <a:solidFill>
               <a:srgbClr val="00A8D8"/>
             </a:solidFill>
             <a:prstDash val="solid"/>
           </a:ln>
         </p:spPr>
-        <p:style>
-          <a:lnRef xmlns:a="http://schemas.openxmlformats.org/drawingml/2006/main" idx="0"/>
-          <a:fillRef xmlns:a="http://schemas.openxmlformats.org/drawingml/2006/main" idx="0"/>
-          <a:effectRef xmlns:a="http://schemas.openxmlformats.org/drawingml/2006/main" idx="4"/>
-          <a:fontRef xmlns:a="http://schemas.openxmlformats.org/drawingml/2006/main" idx="major"/>
-        </p:style>
-      </p:sp>
-      <p:sp>
-        <p:nvSpPr>
-          <p:cNvPr id="12" name="">
-            <a:extLst xmlns:a="http://schemas.openxmlformats.org/drawingml/2006/main">
-              <a:ext uri="{FF2B5EF4-FFF2-40B4-BE49-F238E27FC236}">
-                <a16:creationId xmlns:a16="http://schemas.microsoft.com/office/drawing/2014/main" id="{9CEB146D-86E2-47C1-8EB6-72B28614FEE0}"/>
+      </p:sp>
+      <p:sp>
+        <p:nvSpPr>
+          <p:cNvPr id="13" name="">
+            <a:extLst xmlns:a="http://schemas.openxmlformats.org/drawingml/2006/main">
+              <a:ext uri="{FF2B5EF4-FFF2-40B4-BE49-F238E27FC236}">
+                <a16:creationId xmlns:a16="http://schemas.microsoft.com/office/drawing/2014/main" id="{7732E191-AD30-4F4D-90F2-540C128C5CB0}"/>
               </a:ext>
             </a:extLst>
           </p:cNvPr>
@@ -1624,32 +1653,28 @@
         </p:nvSpPr>
         <p:spPr>
           <a:xfrm xmlns:a="http://schemas.openxmlformats.org/drawingml/2006/main">
-            <a:off x="4048125" y="1333500"/>
-            <a:ext cx="2343150" cy="419100"/>
-          </a:xfrm>
-          <a:prstGeom xmlns:a="http://schemas.openxmlformats.org/drawingml/2006/main" prst="roundRect">
-            <a:avLst>
-              <a:gd name="adj" fmla="val 27273"/>
-            </a:avLst>
-          </a:prstGeom>
-          <a:solidFill xmlns:a="http://schemas.openxmlformats.org/drawingml/2006/main">
-            <a:srgbClr val="1677C8"/>
-          </a:solidFill>
+            <a:off x="3924300" y="1809750"/>
+            <a:ext cx="2095500" cy="285750"/>
+          </a:xfrm>
+          <a:prstGeom xmlns:a="http://schemas.openxmlformats.org/drawingml/2006/main" prst="rect">
+            <a:avLst/>
+          </a:prstGeom>
+          <a:noFill xmlns:a="http://schemas.openxmlformats.org/drawingml/2006/main"/>
           <a:ln xmlns:a="http://schemas.openxmlformats.org/drawingml/2006/main" w="0">
             <a:noFill/>
             <a:prstDash val="solid"/>
           </a:ln>
         </p:spPr>
         <p:txBody>
-          <a:bodyPr xmlns:a="http://schemas.openxmlformats.org/drawingml/2006/main" lIns="114300" tIns="76200" rIns="114300" bIns="76200" anchor="ctr">
-            <a:normAutofit fontScale="97086"/>
+          <a:bodyPr xmlns:a="http://schemas.openxmlformats.org/drawingml/2006/main" lIns="0" tIns="0" rIns="0" bIns="0" anchor="ctr">
+            <a:normAutofit fontScale="100000"/>
           </a:bodyPr>
           <a:lstStyle xmlns:a="http://schemas.openxmlformats.org/drawingml/2006/main"/>
           <a:p xmlns:a="http://schemas.openxmlformats.org/drawingml/2006/main">
-            <a:pPr algn="l">
+            <a:pPr algn="ctr">
               <a:defRPr sz="1350" b="1">
                 <a:solidFill>
-                  <a:srgbClr val="FFFFFF"/>
+                  <a:srgbClr val="1677C8"/>
                 </a:solidFill>
                 <a:latin typeface="Microsoft YaHei"/>
                 <a:ea typeface="Microsoft YaHei"/>
@@ -1659,7 +1684,7 @@
             <a:r>
               <a:rPr sz="1350" b="1">
                 <a:solidFill>
-                  <a:srgbClr val="FFFFFF"/>
+                  <a:srgbClr val="1677C8"/>
                 </a:solidFill>
                 <a:latin typeface="Microsoft YaHei"/>
                 <a:ea typeface="Microsoft YaHei"/>
@@ -1672,10 +1697,10 @@
       </p:sp>
       <p:sp>
         <p:nvSpPr>
-          <p:cNvPr id="13" name="">
-            <a:extLst xmlns:a="http://schemas.openxmlformats.org/drawingml/2006/main">
-              <a:ext uri="{FF2B5EF4-FFF2-40B4-BE49-F238E27FC236}">
-                <a16:creationId xmlns:a16="http://schemas.microsoft.com/office/drawing/2014/main" id="{AA2265C9-484D-493B-9F49-0D64CFA50541}"/>
+          <p:cNvPr id="14" name="PPAGENT_QA|parent=fishbone-item-2-0|domains=fishbone-items">
+            <a:extLst xmlns:a="http://schemas.openxmlformats.org/drawingml/2006/main">
+              <a:ext uri="{FF2B5EF4-FFF2-40B4-BE49-F238E27FC236}">
+                <a16:creationId xmlns:a16="http://schemas.microsoft.com/office/drawing/2014/main" id="{34503227-979E-4C47-A6F4-78E82C07A093}"/>
               </a:ext>
             </a:extLst>
           </p:cNvPr>
@@ -1686,26 +1711,30 @@
         </p:nvSpPr>
         <p:spPr>
           <a:xfrm xmlns:a="http://schemas.openxmlformats.org/drawingml/2006/main">
-            <a:off x="4219575" y="1866900"/>
-            <a:ext cx="2000250" cy="742950"/>
-          </a:xfrm>
-          <a:prstGeom xmlns:a="http://schemas.openxmlformats.org/drawingml/2006/main" prst="rect">
-            <a:avLst/>
-          </a:prstGeom>
-          <a:noFill xmlns:a="http://schemas.openxmlformats.org/drawingml/2006/main"/>
-          <a:ln xmlns:a="http://schemas.openxmlformats.org/drawingml/2006/main" w="0">
-            <a:noFill/>
-            <a:prstDash val="solid"/>
-          </a:ln>
-        </p:spPr>
-        <p:txBody>
-          <a:bodyPr xmlns:a="http://schemas.openxmlformats.org/drawingml/2006/main" lIns="0" tIns="0" rIns="0" bIns="0" anchor="t">
+            <a:off x="3981450" y="2190750"/>
+            <a:ext cx="2019300" cy="266700"/>
+          </a:xfrm>
+          <a:prstGeom xmlns:a="http://schemas.openxmlformats.org/drawingml/2006/main" prst="parallelogram">
+            <a:avLst/>
+          </a:prstGeom>
+          <a:solidFill xmlns:a="http://schemas.openxmlformats.org/drawingml/2006/main">
+            <a:srgbClr val="F0F5FA"/>
+          </a:solidFill>
+          <a:ln xmlns:a="http://schemas.openxmlformats.org/drawingml/2006/main" w="9525">
+            <a:solidFill>
+              <a:srgbClr val="B8CCE0"/>
+            </a:solidFill>
+            <a:prstDash val="solid"/>
+          </a:ln>
+        </p:spPr>
+        <p:txBody>
+          <a:bodyPr xmlns:a="http://schemas.openxmlformats.org/drawingml/2006/main" lIns="114300" tIns="9525" rIns="114300" bIns="9525" anchor="ctr">
             <a:normAutofit fontScale="100000"/>
           </a:bodyPr>
           <a:lstStyle xmlns:a="http://schemas.openxmlformats.org/drawingml/2006/main"/>
           <a:p xmlns:a="http://schemas.openxmlformats.org/drawingml/2006/main">
-            <a:pPr algn="l">
-              <a:defRPr sz="1125" b="0">
+            <a:pPr algn="ctr">
+              <a:defRPr sz="1200" b="0">
                 <a:solidFill>
                   <a:srgbClr val="475569"/>
                 </a:solidFill>
@@ -1715,7 +1744,7 @@
               </a:defRPr>
             </a:pPr>
             <a:r>
-              <a:rPr sz="1125" b="0">
+              <a:rPr sz="1200" b="0">
                 <a:solidFill>
                   <a:srgbClr val="475569"/>
                 </a:solidFill>
@@ -1723,12 +1752,51 @@
                 <a:ea typeface="Microsoft YaHei"/>
                 <a:cs typeface="Microsoft YaHei"/>
               </a:rPr>
-              <a:t>• 系统稳定性不足</a:t>
+              <a:t>系统稳定性不足</a:t>
             </a:r>
           </a:p>
+        </p:txBody>
+      </p:sp>
+      <p:sp>
+        <p:nvSpPr>
+          <p:cNvPr id="15" name="PPAGENT_QA|parent=fishbone-item-2-1|domains=fishbone-items">
+            <a:extLst xmlns:a="http://schemas.openxmlformats.org/drawingml/2006/main">
+              <a:ext uri="{FF2B5EF4-FFF2-40B4-BE49-F238E27FC236}">
+                <a16:creationId xmlns:a16="http://schemas.microsoft.com/office/drawing/2014/main" id="{21382AE2-1D80-440F-8226-EF81D595D1AE}"/>
+              </a:ext>
+            </a:extLst>
+          </p:cNvPr>
+          <p:cNvSpPr>
+            <a:spLocks xmlns:a="http://schemas.openxmlformats.org/drawingml/2006/main" noGrp="1"/>
+          </p:cNvSpPr>
+          <p:nvPr/>
+        </p:nvSpPr>
+        <p:spPr>
+          <a:xfrm xmlns:a="http://schemas.openxmlformats.org/drawingml/2006/main">
+            <a:off x="3924300" y="2495550"/>
+            <a:ext cx="2019300" cy="266700"/>
+          </a:xfrm>
+          <a:prstGeom xmlns:a="http://schemas.openxmlformats.org/drawingml/2006/main" prst="parallelogram">
+            <a:avLst/>
+          </a:prstGeom>
+          <a:solidFill xmlns:a="http://schemas.openxmlformats.org/drawingml/2006/main">
+            <a:srgbClr val="F0F5FA"/>
+          </a:solidFill>
+          <a:ln xmlns:a="http://schemas.openxmlformats.org/drawingml/2006/main" w="9525">
+            <a:solidFill>
+              <a:srgbClr val="B8CCE0"/>
+            </a:solidFill>
+            <a:prstDash val="solid"/>
+          </a:ln>
+        </p:spPr>
+        <p:txBody>
+          <a:bodyPr xmlns:a="http://schemas.openxmlformats.org/drawingml/2006/main" lIns="114300" tIns="9525" rIns="114300" bIns="9525" anchor="ctr">
+            <a:normAutofit fontScale="100000"/>
+          </a:bodyPr>
+          <a:lstStyle xmlns:a="http://schemas.openxmlformats.org/drawingml/2006/main"/>
           <a:p xmlns:a="http://schemas.openxmlformats.org/drawingml/2006/main">
-            <a:pPr algn="l">
-              <a:defRPr sz="1125" b="0">
+            <a:pPr algn="ctr">
+              <a:defRPr sz="1200" b="0">
                 <a:solidFill>
                   <a:srgbClr val="475569"/>
                 </a:solidFill>
@@ -1738,7 +1806,7 @@
               </a:defRPr>
             </a:pPr>
             <a:r>
-              <a:rPr sz="1125" b="0">
+              <a:rPr sz="1200" b="0">
                 <a:solidFill>
                   <a:srgbClr val="475569"/>
                 </a:solidFill>
@@ -1746,12 +1814,51 @@
                 <a:ea typeface="Microsoft YaHei"/>
                 <a:cs typeface="Microsoft YaHei"/>
               </a:rPr>
-              <a:t>• 接口依赖复杂</a:t>
+              <a:t>接口依赖复杂</a:t>
             </a:r>
           </a:p>
+        </p:txBody>
+      </p:sp>
+      <p:sp>
+        <p:nvSpPr>
+          <p:cNvPr id="16" name="PPAGENT_QA|parent=fishbone-item-2-2|domains=fishbone-items">
+            <a:extLst xmlns:a="http://schemas.openxmlformats.org/drawingml/2006/main">
+              <a:ext uri="{FF2B5EF4-FFF2-40B4-BE49-F238E27FC236}">
+                <a16:creationId xmlns:a16="http://schemas.microsoft.com/office/drawing/2014/main" id="{4590A6CA-3861-44DE-94A5-1CF6F34C118C}"/>
+              </a:ext>
+            </a:extLst>
+          </p:cNvPr>
+          <p:cNvSpPr>
+            <a:spLocks xmlns:a="http://schemas.openxmlformats.org/drawingml/2006/main" noGrp="1"/>
+          </p:cNvSpPr>
+          <p:nvPr/>
+        </p:nvSpPr>
+        <p:spPr>
+          <a:xfrm xmlns:a="http://schemas.openxmlformats.org/drawingml/2006/main">
+            <a:off x="3867150" y="2800350"/>
+            <a:ext cx="2019300" cy="266700"/>
+          </a:xfrm>
+          <a:prstGeom xmlns:a="http://schemas.openxmlformats.org/drawingml/2006/main" prst="parallelogram">
+            <a:avLst/>
+          </a:prstGeom>
+          <a:solidFill xmlns:a="http://schemas.openxmlformats.org/drawingml/2006/main">
+            <a:srgbClr val="F0F5FA"/>
+          </a:solidFill>
+          <a:ln xmlns:a="http://schemas.openxmlformats.org/drawingml/2006/main" w="9525">
+            <a:solidFill>
+              <a:srgbClr val="B8CCE0"/>
+            </a:solidFill>
+            <a:prstDash val="solid"/>
+          </a:ln>
+        </p:spPr>
+        <p:txBody>
+          <a:bodyPr xmlns:a="http://schemas.openxmlformats.org/drawingml/2006/main" lIns="114300" tIns="9525" rIns="114300" bIns="9525" anchor="ctr">
+            <a:normAutofit fontScale="100000"/>
+          </a:bodyPr>
+          <a:lstStyle xmlns:a="http://schemas.openxmlformats.org/drawingml/2006/main"/>
           <a:p xmlns:a="http://schemas.openxmlformats.org/drawingml/2006/main">
-            <a:pPr algn="l">
-              <a:defRPr sz="1125" b="0">
+            <a:pPr algn="ctr">
+              <a:defRPr sz="1200" b="0">
                 <a:solidFill>
                   <a:srgbClr val="475569"/>
                 </a:solidFill>
@@ -1761,7 +1868,7 @@
               </a:defRPr>
             </a:pPr>
             <a:r>
-              <a:rPr sz="1125" b="0">
+              <a:rPr sz="1200" b="0">
                 <a:solidFill>
                   <a:srgbClr val="475569"/>
                 </a:solidFill>
@@ -1769,29 +1876,29 @@
                 <a:ea typeface="Microsoft YaHei"/>
                 <a:cs typeface="Microsoft YaHei"/>
               </a:rPr>
-              <a:t>• 测试覆盖不足</a:t>
+              <a:t>测试覆盖不足</a:t>
             </a:r>
           </a:p>
         </p:txBody>
       </p:sp>
       <p:sp>
         <p:nvSpPr>
-          <p:cNvPr id="14" name="">
-            <a:extLst xmlns:a="http://schemas.openxmlformats.org/drawingml/2006/main">
-              <a:ext uri="{FF2B5EF4-FFF2-40B4-BE49-F238E27FC236}">
-                <a16:creationId xmlns:a16="http://schemas.microsoft.com/office/drawing/2014/main" id="{A9A73655-8392-46E7-B79C-A351C8BABCC3}"/>
-              </a:ext>
-            </a:extLst>
-          </p:cNvPr>
-          <p:cNvSpPr>
-            <a:spLocks xmlns:a="http://schemas.openxmlformats.org/drawingml/2006/main" noGrp="1"/>
-          </p:cNvSpPr>
-          <p:nvPr/>
-        </p:nvSpPr>
-        <p:spPr>
-          <a:xfrm xmlns:a="http://schemas.openxmlformats.org/drawingml/2006/main" flipV="0">
-            <a:off x="7696200" y="2724150"/>
-            <a:ext cx="876300" cy="752475"/>
+          <p:cNvPr id="17" name="PPAGENT_CONNECTOR|from=fishbone-item-4-2|fromSide=bottom|to=fishbone-joint-4|toSide=center">
+            <a:extLst xmlns:a="http://schemas.openxmlformats.org/drawingml/2006/main">
+              <a:ext uri="{FF2B5EF4-FFF2-40B4-BE49-F238E27FC236}">
+                <a16:creationId xmlns:a16="http://schemas.microsoft.com/office/drawing/2014/main" id="{5B074C62-ACF7-4924-86C9-4CAADEF32DAC}"/>
+              </a:ext>
+            </a:extLst>
+          </p:cNvPr>
+          <p:cNvSpPr>
+            <a:spLocks xmlns:a="http://schemas.openxmlformats.org/drawingml/2006/main" noGrp="1"/>
+          </p:cNvSpPr>
+          <p:nvPr/>
+        </p:nvSpPr>
+        <p:spPr>
+          <a:xfrm xmlns:a="http://schemas.openxmlformats.org/drawingml/2006/main" flipH="0" flipV="0">
+            <a:off x="7543800" y="3067050"/>
+            <a:ext cx="742950" cy="495300"/>
           </a:xfrm>
           <a:prstGeom xmlns:a="http://schemas.openxmlformats.org/drawingml/2006/main" prst="line">
             <a:avLst/>
@@ -1807,10 +1914,10 @@
       </p:sp>
       <p:sp>
         <p:nvSpPr>
-          <p:cNvPr id="15" name="">
-            <a:extLst xmlns:a="http://schemas.openxmlformats.org/drawingml/2006/main">
-              <a:ext uri="{FF2B5EF4-FFF2-40B4-BE49-F238E27FC236}">
-                <a16:creationId xmlns:a16="http://schemas.microsoft.com/office/drawing/2014/main" id="{F0B408E8-1DDB-4B1A-B8B4-424452AC0C4D}"/>
+          <p:cNvPr id="18" name="PPAGENT_QA|parent=fishbone-joint-4">
+            <a:extLst xmlns:a="http://schemas.openxmlformats.org/drawingml/2006/main">
+              <a:ext uri="{FF2B5EF4-FFF2-40B4-BE49-F238E27FC236}">
+                <a16:creationId xmlns:a16="http://schemas.microsoft.com/office/drawing/2014/main" id="{A22A537B-58A0-49CC-B3E3-E21344D4F4E4}"/>
               </a:ext>
             </a:extLst>
           </p:cNvPr>
@@ -1821,37 +1928,29 @@
         </p:nvSpPr>
         <p:spPr>
           <a:xfrm xmlns:a="http://schemas.openxmlformats.org/drawingml/2006/main">
-            <a:off x="6762750" y="1333500"/>
-            <a:ext cx="2343150" cy="1428750"/>
-          </a:xfrm>
-          <a:prstGeom xmlns:a="http://schemas.openxmlformats.org/drawingml/2006/main" prst="roundRect">
-            <a:avLst>
-              <a:gd name="adj" fmla="val 8000"/>
-            </a:avLst>
+            <a:off x="8210550" y="3486150"/>
+            <a:ext cx="152400" cy="152400"/>
+          </a:xfrm>
+          <a:prstGeom xmlns:a="http://schemas.openxmlformats.org/drawingml/2006/main" prst="ellipse">
+            <a:avLst/>
           </a:prstGeom>
           <a:solidFill xmlns:a="http://schemas.openxmlformats.org/drawingml/2006/main">
             <a:srgbClr val="FFFFFF"/>
           </a:solidFill>
-          <a:ln xmlns:a="http://schemas.openxmlformats.org/drawingml/2006/main" w="14288">
+          <a:ln xmlns:a="http://schemas.openxmlformats.org/drawingml/2006/main" w="19050">
             <a:solidFill>
               <a:srgbClr val="00A8D8"/>
             </a:solidFill>
             <a:prstDash val="solid"/>
           </a:ln>
         </p:spPr>
-        <p:style>
-          <a:lnRef xmlns:a="http://schemas.openxmlformats.org/drawingml/2006/main" idx="0"/>
-          <a:fillRef xmlns:a="http://schemas.openxmlformats.org/drawingml/2006/main" idx="0"/>
-          <a:effectRef xmlns:a="http://schemas.openxmlformats.org/drawingml/2006/main" idx="4"/>
-          <a:fontRef xmlns:a="http://schemas.openxmlformats.org/drawingml/2006/main" idx="major"/>
-        </p:style>
-      </p:sp>
-      <p:sp>
-        <p:nvSpPr>
-          <p:cNvPr id="16" name="">
-            <a:extLst xmlns:a="http://schemas.openxmlformats.org/drawingml/2006/main">
-              <a:ext uri="{FF2B5EF4-FFF2-40B4-BE49-F238E27FC236}">
-                <a16:creationId xmlns:a16="http://schemas.microsoft.com/office/drawing/2014/main" id="{C2DCE086-B8C1-48CD-9DC9-A72B24806EE4}"/>
+      </p:sp>
+      <p:sp>
+        <p:nvSpPr>
+          <p:cNvPr id="19" name="">
+            <a:extLst xmlns:a="http://schemas.openxmlformats.org/drawingml/2006/main">
+              <a:ext uri="{FF2B5EF4-FFF2-40B4-BE49-F238E27FC236}">
+                <a16:creationId xmlns:a16="http://schemas.microsoft.com/office/drawing/2014/main" id="{33864CCD-FB15-4C56-AF98-2722AF52F3ED}"/>
               </a:ext>
             </a:extLst>
           </p:cNvPr>
@@ -1862,32 +1961,28 @@
         </p:nvSpPr>
         <p:spPr>
           <a:xfrm xmlns:a="http://schemas.openxmlformats.org/drawingml/2006/main">
-            <a:off x="6762750" y="1333500"/>
-            <a:ext cx="2343150" cy="419100"/>
-          </a:xfrm>
-          <a:prstGeom xmlns:a="http://schemas.openxmlformats.org/drawingml/2006/main" prst="roundRect">
-            <a:avLst>
-              <a:gd name="adj" fmla="val 27273"/>
-            </a:avLst>
-          </a:prstGeom>
-          <a:solidFill xmlns:a="http://schemas.openxmlformats.org/drawingml/2006/main">
-            <a:srgbClr val="1677C8"/>
-          </a:solidFill>
+            <a:off x="6591300" y="1809750"/>
+            <a:ext cx="2095500" cy="285750"/>
+          </a:xfrm>
+          <a:prstGeom xmlns:a="http://schemas.openxmlformats.org/drawingml/2006/main" prst="rect">
+            <a:avLst/>
+          </a:prstGeom>
+          <a:noFill xmlns:a="http://schemas.openxmlformats.org/drawingml/2006/main"/>
           <a:ln xmlns:a="http://schemas.openxmlformats.org/drawingml/2006/main" w="0">
             <a:noFill/>
             <a:prstDash val="solid"/>
           </a:ln>
         </p:spPr>
         <p:txBody>
-          <a:bodyPr xmlns:a="http://schemas.openxmlformats.org/drawingml/2006/main" lIns="114300" tIns="76200" rIns="114300" bIns="76200" anchor="ctr">
-            <a:normAutofit fontScale="97086"/>
+          <a:bodyPr xmlns:a="http://schemas.openxmlformats.org/drawingml/2006/main" lIns="0" tIns="0" rIns="0" bIns="0" anchor="ctr">
+            <a:normAutofit fontScale="100000"/>
           </a:bodyPr>
           <a:lstStyle xmlns:a="http://schemas.openxmlformats.org/drawingml/2006/main"/>
           <a:p xmlns:a="http://schemas.openxmlformats.org/drawingml/2006/main">
-            <a:pPr algn="l">
+            <a:pPr algn="ctr">
               <a:defRPr sz="1350" b="1">
                 <a:solidFill>
-                  <a:srgbClr val="FFFFFF"/>
+                  <a:srgbClr val="1677C8"/>
                 </a:solidFill>
                 <a:latin typeface="Microsoft YaHei"/>
                 <a:ea typeface="Microsoft YaHei"/>
@@ -1897,7 +1992,7 @@
             <a:r>
               <a:rPr sz="1350" b="1">
                 <a:solidFill>
-                  <a:srgbClr val="FFFFFF"/>
+                  <a:srgbClr val="1677C8"/>
                 </a:solidFill>
                 <a:latin typeface="Microsoft YaHei"/>
                 <a:ea typeface="Microsoft YaHei"/>
@@ -1910,10 +2005,10 @@
       </p:sp>
       <p:sp>
         <p:nvSpPr>
-          <p:cNvPr id="17" name="">
-            <a:extLst xmlns:a="http://schemas.openxmlformats.org/drawingml/2006/main">
-              <a:ext uri="{FF2B5EF4-FFF2-40B4-BE49-F238E27FC236}">
-                <a16:creationId xmlns:a16="http://schemas.microsoft.com/office/drawing/2014/main" id="{95ECE755-D61A-417B-9842-0025070CB3B3}"/>
+          <p:cNvPr id="20" name="PPAGENT_QA|parent=fishbone-item-4-0|domains=fishbone-items">
+            <a:extLst xmlns:a="http://schemas.openxmlformats.org/drawingml/2006/main">
+              <a:ext uri="{FF2B5EF4-FFF2-40B4-BE49-F238E27FC236}">
+                <a16:creationId xmlns:a16="http://schemas.microsoft.com/office/drawing/2014/main" id="{13B88648-A63D-45F6-B987-A92B012C8210}"/>
               </a:ext>
             </a:extLst>
           </p:cNvPr>
@@ -1924,26 +2019,30 @@
         </p:nvSpPr>
         <p:spPr>
           <a:xfrm xmlns:a="http://schemas.openxmlformats.org/drawingml/2006/main">
-            <a:off x="6934200" y="1866900"/>
-            <a:ext cx="2000250" cy="742950"/>
-          </a:xfrm>
-          <a:prstGeom xmlns:a="http://schemas.openxmlformats.org/drawingml/2006/main" prst="rect">
-            <a:avLst/>
-          </a:prstGeom>
-          <a:noFill xmlns:a="http://schemas.openxmlformats.org/drawingml/2006/main"/>
-          <a:ln xmlns:a="http://schemas.openxmlformats.org/drawingml/2006/main" w="0">
-            <a:noFill/>
-            <a:prstDash val="solid"/>
-          </a:ln>
-        </p:spPr>
-        <p:txBody>
-          <a:bodyPr xmlns:a="http://schemas.openxmlformats.org/drawingml/2006/main" lIns="0" tIns="0" rIns="0" bIns="0" anchor="t">
+            <a:off x="6648450" y="2190750"/>
+            <a:ext cx="2019300" cy="266700"/>
+          </a:xfrm>
+          <a:prstGeom xmlns:a="http://schemas.openxmlformats.org/drawingml/2006/main" prst="parallelogram">
+            <a:avLst/>
+          </a:prstGeom>
+          <a:solidFill xmlns:a="http://schemas.openxmlformats.org/drawingml/2006/main">
+            <a:srgbClr val="F0F5FA"/>
+          </a:solidFill>
+          <a:ln xmlns:a="http://schemas.openxmlformats.org/drawingml/2006/main" w="9525">
+            <a:solidFill>
+              <a:srgbClr val="B8CCE0"/>
+            </a:solidFill>
+            <a:prstDash val="solid"/>
+          </a:ln>
+        </p:spPr>
+        <p:txBody>
+          <a:bodyPr xmlns:a="http://schemas.openxmlformats.org/drawingml/2006/main" lIns="114300" tIns="9525" rIns="114300" bIns="9525" anchor="ctr">
             <a:normAutofit fontScale="100000"/>
           </a:bodyPr>
           <a:lstStyle xmlns:a="http://schemas.openxmlformats.org/drawingml/2006/main"/>
           <a:p xmlns:a="http://schemas.openxmlformats.org/drawingml/2006/main">
-            <a:pPr algn="l">
-              <a:defRPr sz="1125" b="0">
+            <a:pPr algn="ctr">
+              <a:defRPr sz="1200" b="0">
                 <a:solidFill>
                   <a:srgbClr val="475569"/>
                 </a:solidFill>
@@ -1953,7 +2052,7 @@
               </a:defRPr>
             </a:pPr>
             <a:r>
-              <a:rPr sz="1125" b="0">
+              <a:rPr sz="1200" b="0">
                 <a:solidFill>
                   <a:srgbClr val="475569"/>
                 </a:solidFill>
@@ -1961,12 +2060,51 @@
                 <a:ea typeface="Microsoft YaHei"/>
                 <a:cs typeface="Microsoft YaHei"/>
               </a:rPr>
-              <a:t>• 目标多次调整</a:t>
+              <a:t>目标多次调整</a:t>
             </a:r>
           </a:p>
+        </p:txBody>
+      </p:sp>
+      <p:sp>
+        <p:nvSpPr>
+          <p:cNvPr id="21" name="PPAGENT_QA|parent=fishbone-item-4-1|domains=fishbone-items">
+            <a:extLst xmlns:a="http://schemas.openxmlformats.org/drawingml/2006/main">
+              <a:ext uri="{FF2B5EF4-FFF2-40B4-BE49-F238E27FC236}">
+                <a16:creationId xmlns:a16="http://schemas.microsoft.com/office/drawing/2014/main" id="{CBF59A45-3DBC-4C91-B58F-C5C38886FD9B}"/>
+              </a:ext>
+            </a:extLst>
+          </p:cNvPr>
+          <p:cNvSpPr>
+            <a:spLocks xmlns:a="http://schemas.openxmlformats.org/drawingml/2006/main" noGrp="1"/>
+          </p:cNvSpPr>
+          <p:nvPr/>
+        </p:nvSpPr>
+        <p:spPr>
+          <a:xfrm xmlns:a="http://schemas.openxmlformats.org/drawingml/2006/main">
+            <a:off x="6591300" y="2495550"/>
+            <a:ext cx="2019300" cy="266700"/>
+          </a:xfrm>
+          <a:prstGeom xmlns:a="http://schemas.openxmlformats.org/drawingml/2006/main" prst="parallelogram">
+            <a:avLst/>
+          </a:prstGeom>
+          <a:solidFill xmlns:a="http://schemas.openxmlformats.org/drawingml/2006/main">
+            <a:srgbClr val="F0F5FA"/>
+          </a:solidFill>
+          <a:ln xmlns:a="http://schemas.openxmlformats.org/drawingml/2006/main" w="9525">
+            <a:solidFill>
+              <a:srgbClr val="B8CCE0"/>
+            </a:solidFill>
+            <a:prstDash val="solid"/>
+          </a:ln>
+        </p:spPr>
+        <p:txBody>
+          <a:bodyPr xmlns:a="http://schemas.openxmlformats.org/drawingml/2006/main" lIns="114300" tIns="9525" rIns="114300" bIns="9525" anchor="ctr">
+            <a:normAutofit fontScale="100000"/>
+          </a:bodyPr>
+          <a:lstStyle xmlns:a="http://schemas.openxmlformats.org/drawingml/2006/main"/>
           <a:p xmlns:a="http://schemas.openxmlformats.org/drawingml/2006/main">
-            <a:pPr algn="l">
-              <a:defRPr sz="1125" b="0">
+            <a:pPr algn="ctr">
+              <a:defRPr sz="1200" b="0">
                 <a:solidFill>
                   <a:srgbClr val="475569"/>
                 </a:solidFill>
@@ -1976,7 +2114,7 @@
               </a:defRPr>
             </a:pPr>
             <a:r>
-              <a:rPr sz="1125" b="0">
+              <a:rPr sz="1200" b="0">
                 <a:solidFill>
                   <a:srgbClr val="475569"/>
                 </a:solidFill>
@@ -1984,12 +2122,51 @@
                 <a:ea typeface="Microsoft YaHei"/>
                 <a:cs typeface="Microsoft YaHei"/>
               </a:rPr>
-              <a:t>• 验收口径模糊</a:t>
+              <a:t>验收口径模糊</a:t>
             </a:r>
           </a:p>
+        </p:txBody>
+      </p:sp>
+      <p:sp>
+        <p:nvSpPr>
+          <p:cNvPr id="22" name="PPAGENT_QA|parent=fishbone-item-4-2|domains=fishbone-items">
+            <a:extLst xmlns:a="http://schemas.openxmlformats.org/drawingml/2006/main">
+              <a:ext uri="{FF2B5EF4-FFF2-40B4-BE49-F238E27FC236}">
+                <a16:creationId xmlns:a16="http://schemas.microsoft.com/office/drawing/2014/main" id="{A7AA0D3E-D8F5-4374-A91A-477B8E2922D7}"/>
+              </a:ext>
+            </a:extLst>
+          </p:cNvPr>
+          <p:cNvSpPr>
+            <a:spLocks xmlns:a="http://schemas.openxmlformats.org/drawingml/2006/main" noGrp="1"/>
+          </p:cNvSpPr>
+          <p:nvPr/>
+        </p:nvSpPr>
+        <p:spPr>
+          <a:xfrm xmlns:a="http://schemas.openxmlformats.org/drawingml/2006/main">
+            <a:off x="6534150" y="2800350"/>
+            <a:ext cx="2019300" cy="266700"/>
+          </a:xfrm>
+          <a:prstGeom xmlns:a="http://schemas.openxmlformats.org/drawingml/2006/main" prst="parallelogram">
+            <a:avLst/>
+          </a:prstGeom>
+          <a:solidFill xmlns:a="http://schemas.openxmlformats.org/drawingml/2006/main">
+            <a:srgbClr val="F0F5FA"/>
+          </a:solidFill>
+          <a:ln xmlns:a="http://schemas.openxmlformats.org/drawingml/2006/main" w="9525">
+            <a:solidFill>
+              <a:srgbClr val="B8CCE0"/>
+            </a:solidFill>
+            <a:prstDash val="solid"/>
+          </a:ln>
+        </p:spPr>
+        <p:txBody>
+          <a:bodyPr xmlns:a="http://schemas.openxmlformats.org/drawingml/2006/main" lIns="114300" tIns="9525" rIns="114300" bIns="9525" anchor="ctr">
+            <a:normAutofit fontScale="100000"/>
+          </a:bodyPr>
+          <a:lstStyle xmlns:a="http://schemas.openxmlformats.org/drawingml/2006/main"/>
           <a:p xmlns:a="http://schemas.openxmlformats.org/drawingml/2006/main">
-            <a:pPr algn="l">
-              <a:defRPr sz="1125" b="0">
+            <a:pPr algn="ctr">
+              <a:defRPr sz="1200" b="0">
                 <a:solidFill>
                   <a:srgbClr val="475569"/>
                 </a:solidFill>
@@ -1999,7 +2176,7 @@
               </a:defRPr>
             </a:pPr>
             <a:r>
-              <a:rPr sz="1125" b="0">
+              <a:rPr sz="1200" b="0">
                 <a:solidFill>
                   <a:srgbClr val="475569"/>
                 </a:solidFill>
@@ -2007,29 +2184,29 @@
                 <a:ea typeface="Microsoft YaHei"/>
                 <a:cs typeface="Microsoft YaHei"/>
               </a:rPr>
-              <a:t>• 优先级冲突</a:t>
+              <a:t>优先级冲突</a:t>
             </a:r>
           </a:p>
         </p:txBody>
       </p:sp>
       <p:sp>
         <p:nvSpPr>
-          <p:cNvPr id="18" name="">
-            <a:extLst xmlns:a="http://schemas.openxmlformats.org/drawingml/2006/main">
-              <a:ext uri="{FF2B5EF4-FFF2-40B4-BE49-F238E27FC236}">
-                <a16:creationId xmlns:a16="http://schemas.microsoft.com/office/drawing/2014/main" id="{BEBB102B-74A7-44DF-9171-BB6233ABF253}"/>
-              </a:ext>
-            </a:extLst>
-          </p:cNvPr>
-          <p:cNvSpPr>
-            <a:spLocks xmlns:a="http://schemas.openxmlformats.org/drawingml/2006/main" noGrp="1"/>
-          </p:cNvSpPr>
-          <p:nvPr/>
-        </p:nvSpPr>
-        <p:spPr>
-          <a:xfrm xmlns:a="http://schemas.openxmlformats.org/drawingml/2006/main" flipV="1">
-            <a:off x="2266950" y="3476625"/>
-            <a:ext cx="876300" cy="752475"/>
+          <p:cNvPr id="23" name="PPAGENT_CONNECTOR|from=fishbone-item-1-0|fromSide=top|to=fishbone-joint-1|toSide=center">
+            <a:extLst xmlns:a="http://schemas.openxmlformats.org/drawingml/2006/main">
+              <a:ext uri="{FF2B5EF4-FFF2-40B4-BE49-F238E27FC236}">
+                <a16:creationId xmlns:a16="http://schemas.microsoft.com/office/drawing/2014/main" id="{5D435F67-B615-4262-84D5-6F197C768402}"/>
+              </a:ext>
+            </a:extLst>
+          </p:cNvPr>
+          <p:cNvSpPr>
+            <a:spLocks xmlns:a="http://schemas.openxmlformats.org/drawingml/2006/main" noGrp="1"/>
+          </p:cNvSpPr>
+          <p:nvPr/>
+        </p:nvSpPr>
+        <p:spPr>
+          <a:xfrm xmlns:a="http://schemas.openxmlformats.org/drawingml/2006/main" flipH="0" flipV="1">
+            <a:off x="2209800" y="3562350"/>
+            <a:ext cx="742950" cy="495300"/>
           </a:xfrm>
           <a:prstGeom xmlns:a="http://schemas.openxmlformats.org/drawingml/2006/main" prst="line">
             <a:avLst/>
@@ -2045,10 +2222,10 @@
       </p:sp>
       <p:sp>
         <p:nvSpPr>
-          <p:cNvPr id="19" name="">
-            <a:extLst xmlns:a="http://schemas.openxmlformats.org/drawingml/2006/main">
-              <a:ext uri="{FF2B5EF4-FFF2-40B4-BE49-F238E27FC236}">
-                <a16:creationId xmlns:a16="http://schemas.microsoft.com/office/drawing/2014/main" id="{D81C6039-76C5-4822-9E67-DBFA8C95905E}"/>
+          <p:cNvPr id="24" name="PPAGENT_QA|parent=fishbone-joint-1">
+            <a:extLst xmlns:a="http://schemas.openxmlformats.org/drawingml/2006/main">
+              <a:ext uri="{FF2B5EF4-FFF2-40B4-BE49-F238E27FC236}">
+                <a16:creationId xmlns:a16="http://schemas.microsoft.com/office/drawing/2014/main" id="{F82FF5E2-9F6A-4D9F-9D9F-8106A6FDAAA0}"/>
               </a:ext>
             </a:extLst>
           </p:cNvPr>
@@ -2059,37 +2236,29 @@
         </p:nvSpPr>
         <p:spPr>
           <a:xfrm xmlns:a="http://schemas.openxmlformats.org/drawingml/2006/main">
-            <a:off x="1333500" y="4210050"/>
-            <a:ext cx="2343150" cy="1428750"/>
-          </a:xfrm>
-          <a:prstGeom xmlns:a="http://schemas.openxmlformats.org/drawingml/2006/main" prst="roundRect">
-            <a:avLst>
-              <a:gd name="adj" fmla="val 8000"/>
-            </a:avLst>
+            <a:off x="2876550" y="3486150"/>
+            <a:ext cx="152400" cy="152400"/>
+          </a:xfrm>
+          <a:prstGeom xmlns:a="http://schemas.openxmlformats.org/drawingml/2006/main" prst="ellipse">
+            <a:avLst/>
           </a:prstGeom>
           <a:solidFill xmlns:a="http://schemas.openxmlformats.org/drawingml/2006/main">
             <a:srgbClr val="FFFFFF"/>
           </a:solidFill>
-          <a:ln xmlns:a="http://schemas.openxmlformats.org/drawingml/2006/main" w="14288">
+          <a:ln xmlns:a="http://schemas.openxmlformats.org/drawingml/2006/main" w="19050">
             <a:solidFill>
               <a:srgbClr val="00A8D8"/>
             </a:solidFill>
             <a:prstDash val="solid"/>
           </a:ln>
         </p:spPr>
-        <p:style>
-          <a:lnRef xmlns:a="http://schemas.openxmlformats.org/drawingml/2006/main" idx="0"/>
-          <a:fillRef xmlns:a="http://schemas.openxmlformats.org/drawingml/2006/main" idx="0"/>
-          <a:effectRef xmlns:a="http://schemas.openxmlformats.org/drawingml/2006/main" idx="4"/>
-          <a:fontRef xmlns:a="http://schemas.openxmlformats.org/drawingml/2006/main" idx="major"/>
-        </p:style>
-      </p:sp>
-      <p:sp>
-        <p:nvSpPr>
-          <p:cNvPr id="20" name="">
-            <a:extLst xmlns:a="http://schemas.openxmlformats.org/drawingml/2006/main">
-              <a:ext uri="{FF2B5EF4-FFF2-40B4-BE49-F238E27FC236}">
-                <a16:creationId xmlns:a16="http://schemas.microsoft.com/office/drawing/2014/main" id="{F6C681E7-7F76-4F91-BA56-E408295431C5}"/>
+      </p:sp>
+      <p:sp>
+        <p:nvSpPr>
+          <p:cNvPr id="25" name="">
+            <a:extLst xmlns:a="http://schemas.openxmlformats.org/drawingml/2006/main">
+              <a:ext uri="{FF2B5EF4-FFF2-40B4-BE49-F238E27FC236}">
+                <a16:creationId xmlns:a16="http://schemas.microsoft.com/office/drawing/2014/main" id="{C8310582-CC73-4BE2-9E93-0F61F0EC6472}"/>
               </a:ext>
             </a:extLst>
           </p:cNvPr>
@@ -2100,32 +2269,28 @@
         </p:nvSpPr>
         <p:spPr>
           <a:xfrm xmlns:a="http://schemas.openxmlformats.org/drawingml/2006/main">
-            <a:off x="1333500" y="4210050"/>
-            <a:ext cx="2343150" cy="419100"/>
-          </a:xfrm>
-          <a:prstGeom xmlns:a="http://schemas.openxmlformats.org/drawingml/2006/main" prst="roundRect">
-            <a:avLst>
-              <a:gd name="adj" fmla="val 27273"/>
-            </a:avLst>
-          </a:prstGeom>
-          <a:solidFill xmlns:a="http://schemas.openxmlformats.org/drawingml/2006/main">
-            <a:srgbClr val="00A8D8"/>
-          </a:solidFill>
+            <a:off x="1257300" y="5029200"/>
+            <a:ext cx="2095500" cy="285750"/>
+          </a:xfrm>
+          <a:prstGeom xmlns:a="http://schemas.openxmlformats.org/drawingml/2006/main" prst="rect">
+            <a:avLst/>
+          </a:prstGeom>
+          <a:noFill xmlns:a="http://schemas.openxmlformats.org/drawingml/2006/main"/>
           <a:ln xmlns:a="http://schemas.openxmlformats.org/drawingml/2006/main" w="0">
             <a:noFill/>
             <a:prstDash val="solid"/>
           </a:ln>
         </p:spPr>
         <p:txBody>
-          <a:bodyPr xmlns:a="http://schemas.openxmlformats.org/drawingml/2006/main" lIns="114300" tIns="76200" rIns="114300" bIns="76200" anchor="ctr">
-            <a:normAutofit fontScale="97086"/>
+          <a:bodyPr xmlns:a="http://schemas.openxmlformats.org/drawingml/2006/main" lIns="0" tIns="0" rIns="0" bIns="0" anchor="ctr">
+            <a:normAutofit fontScale="100000"/>
           </a:bodyPr>
           <a:lstStyle xmlns:a="http://schemas.openxmlformats.org/drawingml/2006/main"/>
           <a:p xmlns:a="http://schemas.openxmlformats.org/drawingml/2006/main">
-            <a:pPr algn="l">
+            <a:pPr algn="ctr">
               <a:defRPr sz="1350" b="1">
                 <a:solidFill>
-                  <a:srgbClr val="FFFFFF"/>
+                  <a:srgbClr val="00A8D8"/>
                 </a:solidFill>
                 <a:latin typeface="Microsoft YaHei"/>
                 <a:ea typeface="Microsoft YaHei"/>
@@ -2135,7 +2300,7 @@
             <a:r>
               <a:rPr sz="1350" b="1">
                 <a:solidFill>
-                  <a:srgbClr val="FFFFFF"/>
+                  <a:srgbClr val="00A8D8"/>
                 </a:solidFill>
                 <a:latin typeface="Microsoft YaHei"/>
                 <a:ea typeface="Microsoft YaHei"/>
@@ -2148,10 +2313,10 @@
       </p:sp>
       <p:sp>
         <p:nvSpPr>
-          <p:cNvPr id="21" name="">
-            <a:extLst xmlns:a="http://schemas.openxmlformats.org/drawingml/2006/main">
-              <a:ext uri="{FF2B5EF4-FFF2-40B4-BE49-F238E27FC236}">
-                <a16:creationId xmlns:a16="http://schemas.microsoft.com/office/drawing/2014/main" id="{DA5B725B-EB2E-40DC-940A-49A595622EA3}"/>
+          <p:cNvPr id="26" name="PPAGENT_QA|parent=fishbone-item-1-0|domains=fishbone-items">
+            <a:extLst xmlns:a="http://schemas.openxmlformats.org/drawingml/2006/main">
+              <a:ext uri="{FF2B5EF4-FFF2-40B4-BE49-F238E27FC236}">
+                <a16:creationId xmlns:a16="http://schemas.microsoft.com/office/drawing/2014/main" id="{9DEE1CBA-BA78-49C1-9DA9-067BE44E8499}"/>
               </a:ext>
             </a:extLst>
           </p:cNvPr>
@@ -2162,26 +2327,30 @@
         </p:nvSpPr>
         <p:spPr>
           <a:xfrm xmlns:a="http://schemas.openxmlformats.org/drawingml/2006/main">
-            <a:off x="1504950" y="4743450"/>
-            <a:ext cx="2000250" cy="742950"/>
-          </a:xfrm>
-          <a:prstGeom xmlns:a="http://schemas.openxmlformats.org/drawingml/2006/main" prst="rect">
-            <a:avLst/>
-          </a:prstGeom>
-          <a:noFill xmlns:a="http://schemas.openxmlformats.org/drawingml/2006/main"/>
-          <a:ln xmlns:a="http://schemas.openxmlformats.org/drawingml/2006/main" w="0">
-            <a:noFill/>
-            <a:prstDash val="solid"/>
-          </a:ln>
-        </p:spPr>
-        <p:txBody>
-          <a:bodyPr xmlns:a="http://schemas.openxmlformats.org/drawingml/2006/main" lIns="0" tIns="0" rIns="0" bIns="0" anchor="t">
+            <a:off x="1200150" y="4057650"/>
+            <a:ext cx="2019300" cy="266700"/>
+          </a:xfrm>
+          <a:prstGeom xmlns:a="http://schemas.openxmlformats.org/drawingml/2006/main" prst="parallelogram">
+            <a:avLst/>
+          </a:prstGeom>
+          <a:solidFill xmlns:a="http://schemas.openxmlformats.org/drawingml/2006/main">
+            <a:srgbClr val="F4F8FB"/>
+          </a:solidFill>
+          <a:ln xmlns:a="http://schemas.openxmlformats.org/drawingml/2006/main" w="9525">
+            <a:solidFill>
+              <a:srgbClr val="B9DCE8"/>
+            </a:solidFill>
+            <a:prstDash val="solid"/>
+          </a:ln>
+        </p:spPr>
+        <p:txBody>
+          <a:bodyPr xmlns:a="http://schemas.openxmlformats.org/drawingml/2006/main" lIns="114300" tIns="9525" rIns="114300" bIns="9525" anchor="ctr">
             <a:normAutofit fontScale="100000"/>
           </a:bodyPr>
           <a:lstStyle xmlns:a="http://schemas.openxmlformats.org/drawingml/2006/main"/>
           <a:p xmlns:a="http://schemas.openxmlformats.org/drawingml/2006/main">
-            <a:pPr algn="l">
-              <a:defRPr sz="1125" b="0">
+            <a:pPr algn="ctr">
+              <a:defRPr sz="1200" b="0">
                 <a:solidFill>
                   <a:srgbClr val="475569"/>
                 </a:solidFill>
@@ -2191,7 +2360,7 @@
               </a:defRPr>
             </a:pPr>
             <a:r>
-              <a:rPr sz="1125" b="0">
+              <a:rPr sz="1200" b="0">
                 <a:solidFill>
                   <a:srgbClr val="475569"/>
                 </a:solidFill>
@@ -2199,12 +2368,51 @@
                 <a:ea typeface="Microsoft YaHei"/>
                 <a:cs typeface="Microsoft YaHei"/>
               </a:rPr>
-              <a:t>• 审批链路过长</a:t>
+              <a:t>审批链路过长</a:t>
             </a:r>
           </a:p>
+        </p:txBody>
+      </p:sp>
+      <p:sp>
+        <p:nvSpPr>
+          <p:cNvPr id="27" name="PPAGENT_QA|parent=fishbone-item-1-1|domains=fishbone-items">
+            <a:extLst xmlns:a="http://schemas.openxmlformats.org/drawingml/2006/main">
+              <a:ext uri="{FF2B5EF4-FFF2-40B4-BE49-F238E27FC236}">
+                <a16:creationId xmlns:a16="http://schemas.microsoft.com/office/drawing/2014/main" id="{54EDFCD8-9D8C-49C2-BB8C-26D0752D4A81}"/>
+              </a:ext>
+            </a:extLst>
+          </p:cNvPr>
+          <p:cNvSpPr>
+            <a:spLocks xmlns:a="http://schemas.openxmlformats.org/drawingml/2006/main" noGrp="1"/>
+          </p:cNvSpPr>
+          <p:nvPr/>
+        </p:nvSpPr>
+        <p:spPr>
+          <a:xfrm xmlns:a="http://schemas.openxmlformats.org/drawingml/2006/main">
+            <a:off x="1257300" y="4362450"/>
+            <a:ext cx="2019300" cy="266700"/>
+          </a:xfrm>
+          <a:prstGeom xmlns:a="http://schemas.openxmlformats.org/drawingml/2006/main" prst="parallelogram">
+            <a:avLst/>
+          </a:prstGeom>
+          <a:solidFill xmlns:a="http://schemas.openxmlformats.org/drawingml/2006/main">
+            <a:srgbClr val="F4F8FB"/>
+          </a:solidFill>
+          <a:ln xmlns:a="http://schemas.openxmlformats.org/drawingml/2006/main" w="9525">
+            <a:solidFill>
+              <a:srgbClr val="B9DCE8"/>
+            </a:solidFill>
+            <a:prstDash val="solid"/>
+          </a:ln>
+        </p:spPr>
+        <p:txBody>
+          <a:bodyPr xmlns:a="http://schemas.openxmlformats.org/drawingml/2006/main" lIns="114300" tIns="9525" rIns="114300" bIns="9525" anchor="ctr">
+            <a:normAutofit fontScale="100000"/>
+          </a:bodyPr>
+          <a:lstStyle xmlns:a="http://schemas.openxmlformats.org/drawingml/2006/main"/>
           <a:p xmlns:a="http://schemas.openxmlformats.org/drawingml/2006/main">
-            <a:pPr algn="l">
-              <a:defRPr sz="1125" b="0">
+            <a:pPr algn="ctr">
+              <a:defRPr sz="1200" b="0">
                 <a:solidFill>
                   <a:srgbClr val="475569"/>
                 </a:solidFill>
@@ -2214,7 +2422,7 @@
               </a:defRPr>
             </a:pPr>
             <a:r>
-              <a:rPr sz="1125" b="0">
+              <a:rPr sz="1200" b="0">
                 <a:solidFill>
                   <a:srgbClr val="475569"/>
                 </a:solidFill>
@@ -2222,12 +2430,51 @@
                 <a:ea typeface="Microsoft YaHei"/>
                 <a:cs typeface="Microsoft YaHei"/>
               </a:rPr>
-              <a:t>• 交接标准缺失</a:t>
+              <a:t>交接标准缺失</a:t>
             </a:r>
           </a:p>
+        </p:txBody>
+      </p:sp>
+      <p:sp>
+        <p:nvSpPr>
+          <p:cNvPr id="28" name="PPAGENT_QA|parent=fishbone-item-1-2|domains=fishbone-items">
+            <a:extLst xmlns:a="http://schemas.openxmlformats.org/drawingml/2006/main">
+              <a:ext uri="{FF2B5EF4-FFF2-40B4-BE49-F238E27FC236}">
+                <a16:creationId xmlns:a16="http://schemas.microsoft.com/office/drawing/2014/main" id="{0B6D3C43-A5CC-4245-93D5-5FC1C54639D6}"/>
+              </a:ext>
+            </a:extLst>
+          </p:cNvPr>
+          <p:cNvSpPr>
+            <a:spLocks xmlns:a="http://schemas.openxmlformats.org/drawingml/2006/main" noGrp="1"/>
+          </p:cNvSpPr>
+          <p:nvPr/>
+        </p:nvSpPr>
+        <p:spPr>
+          <a:xfrm xmlns:a="http://schemas.openxmlformats.org/drawingml/2006/main">
+            <a:off x="1314450" y="4667250"/>
+            <a:ext cx="2019300" cy="266700"/>
+          </a:xfrm>
+          <a:prstGeom xmlns:a="http://schemas.openxmlformats.org/drawingml/2006/main" prst="parallelogram">
+            <a:avLst/>
+          </a:prstGeom>
+          <a:solidFill xmlns:a="http://schemas.openxmlformats.org/drawingml/2006/main">
+            <a:srgbClr val="F4F8FB"/>
+          </a:solidFill>
+          <a:ln xmlns:a="http://schemas.openxmlformats.org/drawingml/2006/main" w="9525">
+            <a:solidFill>
+              <a:srgbClr val="B9DCE8"/>
+            </a:solidFill>
+            <a:prstDash val="solid"/>
+          </a:ln>
+        </p:spPr>
+        <p:txBody>
+          <a:bodyPr xmlns:a="http://schemas.openxmlformats.org/drawingml/2006/main" lIns="114300" tIns="9525" rIns="114300" bIns="9525" anchor="ctr">
+            <a:normAutofit fontScale="100000"/>
+          </a:bodyPr>
+          <a:lstStyle xmlns:a="http://schemas.openxmlformats.org/drawingml/2006/main"/>
           <a:p xmlns:a="http://schemas.openxmlformats.org/drawingml/2006/main">
-            <a:pPr algn="l">
-              <a:defRPr sz="1125" b="0">
+            <a:pPr algn="ctr">
+              <a:defRPr sz="1200" b="0">
                 <a:solidFill>
                   <a:srgbClr val="475569"/>
                 </a:solidFill>
@@ -2237,7 +2484,7 @@
               </a:defRPr>
             </a:pPr>
             <a:r>
-              <a:rPr sz="1125" b="0">
+              <a:rPr sz="1200" b="0">
                 <a:solidFill>
                   <a:srgbClr val="475569"/>
                 </a:solidFill>
@@ -2245,29 +2492,29 @@
                 <a:ea typeface="Microsoft YaHei"/>
                 <a:cs typeface="Microsoft YaHei"/>
               </a:rPr>
-              <a:t>• 变更响应迟缓</a:t>
+              <a:t>变更响应迟缓</a:t>
             </a:r>
           </a:p>
         </p:txBody>
       </p:sp>
       <p:sp>
         <p:nvSpPr>
-          <p:cNvPr id="22" name="">
-            <a:extLst xmlns:a="http://schemas.openxmlformats.org/drawingml/2006/main">
-              <a:ext uri="{FF2B5EF4-FFF2-40B4-BE49-F238E27FC236}">
-                <a16:creationId xmlns:a16="http://schemas.microsoft.com/office/drawing/2014/main" id="{ABBEB3C4-1004-4C04-AA0B-839BC24E0DB8}"/>
-              </a:ext>
-            </a:extLst>
-          </p:cNvPr>
-          <p:cNvSpPr>
-            <a:spLocks xmlns:a="http://schemas.openxmlformats.org/drawingml/2006/main" noGrp="1"/>
-          </p:cNvSpPr>
-          <p:nvPr/>
-        </p:nvSpPr>
-        <p:spPr>
-          <a:xfrm xmlns:a="http://schemas.openxmlformats.org/drawingml/2006/main" flipV="1">
-            <a:off x="4981575" y="3476625"/>
-            <a:ext cx="876300" cy="752475"/>
+          <p:cNvPr id="29" name="PPAGENT_CONNECTOR|from=fishbone-item-3-0|fromSide=top|to=fishbone-joint-3|toSide=center">
+            <a:extLst xmlns:a="http://schemas.openxmlformats.org/drawingml/2006/main">
+              <a:ext uri="{FF2B5EF4-FFF2-40B4-BE49-F238E27FC236}">
+                <a16:creationId xmlns:a16="http://schemas.microsoft.com/office/drawing/2014/main" id="{F261E099-AE80-48FA-9DA6-A29C1F609DF1}"/>
+              </a:ext>
+            </a:extLst>
+          </p:cNvPr>
+          <p:cNvSpPr>
+            <a:spLocks xmlns:a="http://schemas.openxmlformats.org/drawingml/2006/main" noGrp="1"/>
+          </p:cNvSpPr>
+          <p:nvPr/>
+        </p:nvSpPr>
+        <p:spPr>
+          <a:xfrm xmlns:a="http://schemas.openxmlformats.org/drawingml/2006/main" flipH="0" flipV="1">
+            <a:off x="4876800" y="3562350"/>
+            <a:ext cx="742950" cy="495300"/>
           </a:xfrm>
           <a:prstGeom xmlns:a="http://schemas.openxmlformats.org/drawingml/2006/main" prst="line">
             <a:avLst/>
@@ -2283,10 +2530,10 @@
       </p:sp>
       <p:sp>
         <p:nvSpPr>
-          <p:cNvPr id="23" name="">
-            <a:extLst xmlns:a="http://schemas.openxmlformats.org/drawingml/2006/main">
-              <a:ext uri="{FF2B5EF4-FFF2-40B4-BE49-F238E27FC236}">
-                <a16:creationId xmlns:a16="http://schemas.microsoft.com/office/drawing/2014/main" id="{40C30CF6-21F4-4AD8-AE71-DE7289891AC9}"/>
+          <p:cNvPr id="30" name="PPAGENT_QA|parent=fishbone-joint-3">
+            <a:extLst xmlns:a="http://schemas.openxmlformats.org/drawingml/2006/main">
+              <a:ext uri="{FF2B5EF4-FFF2-40B4-BE49-F238E27FC236}">
+                <a16:creationId xmlns:a16="http://schemas.microsoft.com/office/drawing/2014/main" id="{E432668F-C33E-401D-822F-928158BD07BC}"/>
               </a:ext>
             </a:extLst>
           </p:cNvPr>
@@ -2297,37 +2544,29 @@
         </p:nvSpPr>
         <p:spPr>
           <a:xfrm xmlns:a="http://schemas.openxmlformats.org/drawingml/2006/main">
-            <a:off x="4048125" y="4210050"/>
-            <a:ext cx="2343150" cy="1428750"/>
-          </a:xfrm>
-          <a:prstGeom xmlns:a="http://schemas.openxmlformats.org/drawingml/2006/main" prst="roundRect">
-            <a:avLst>
-              <a:gd name="adj" fmla="val 8000"/>
-            </a:avLst>
+            <a:off x="5543550" y="3486150"/>
+            <a:ext cx="152400" cy="152400"/>
+          </a:xfrm>
+          <a:prstGeom xmlns:a="http://schemas.openxmlformats.org/drawingml/2006/main" prst="ellipse">
+            <a:avLst/>
           </a:prstGeom>
           <a:solidFill xmlns:a="http://schemas.openxmlformats.org/drawingml/2006/main">
             <a:srgbClr val="FFFFFF"/>
           </a:solidFill>
-          <a:ln xmlns:a="http://schemas.openxmlformats.org/drawingml/2006/main" w="14288">
+          <a:ln xmlns:a="http://schemas.openxmlformats.org/drawingml/2006/main" w="19050">
             <a:solidFill>
               <a:srgbClr val="00A8D8"/>
             </a:solidFill>
             <a:prstDash val="solid"/>
           </a:ln>
         </p:spPr>
-        <p:style>
-          <a:lnRef xmlns:a="http://schemas.openxmlformats.org/drawingml/2006/main" idx="0"/>
-          <a:fillRef xmlns:a="http://schemas.openxmlformats.org/drawingml/2006/main" idx="0"/>
-          <a:effectRef xmlns:a="http://schemas.openxmlformats.org/drawingml/2006/main" idx="4"/>
-          <a:fontRef xmlns:a="http://schemas.openxmlformats.org/drawingml/2006/main" idx="major"/>
-        </p:style>
-      </p:sp>
-      <p:sp>
-        <p:nvSpPr>
-          <p:cNvPr id="24" name="">
-            <a:extLst xmlns:a="http://schemas.openxmlformats.org/drawingml/2006/main">
-              <a:ext uri="{FF2B5EF4-FFF2-40B4-BE49-F238E27FC236}">
-                <a16:creationId xmlns:a16="http://schemas.microsoft.com/office/drawing/2014/main" id="{D8B92BDB-3EFD-4303-BA52-E5B011C49E8E}"/>
+      </p:sp>
+      <p:sp>
+        <p:nvSpPr>
+          <p:cNvPr id="31" name="">
+            <a:extLst xmlns:a="http://schemas.openxmlformats.org/drawingml/2006/main">
+              <a:ext uri="{FF2B5EF4-FFF2-40B4-BE49-F238E27FC236}">
+                <a16:creationId xmlns:a16="http://schemas.microsoft.com/office/drawing/2014/main" id="{2BF00822-E6AE-44A0-A509-D10CD56F7FF6}"/>
               </a:ext>
             </a:extLst>
           </p:cNvPr>
@@ -2338,32 +2577,28 @@
         </p:nvSpPr>
         <p:spPr>
           <a:xfrm xmlns:a="http://schemas.openxmlformats.org/drawingml/2006/main">
-            <a:off x="4048125" y="4210050"/>
-            <a:ext cx="2343150" cy="419100"/>
-          </a:xfrm>
-          <a:prstGeom xmlns:a="http://schemas.openxmlformats.org/drawingml/2006/main" prst="roundRect">
-            <a:avLst>
-              <a:gd name="adj" fmla="val 27273"/>
-            </a:avLst>
-          </a:prstGeom>
-          <a:solidFill xmlns:a="http://schemas.openxmlformats.org/drawingml/2006/main">
-            <a:srgbClr val="00A8D8"/>
-          </a:solidFill>
+            <a:off x="3924300" y="5029200"/>
+            <a:ext cx="2095500" cy="285750"/>
+          </a:xfrm>
+          <a:prstGeom xmlns:a="http://schemas.openxmlformats.org/drawingml/2006/main" prst="rect">
+            <a:avLst/>
+          </a:prstGeom>
+          <a:noFill xmlns:a="http://schemas.openxmlformats.org/drawingml/2006/main"/>
           <a:ln xmlns:a="http://schemas.openxmlformats.org/drawingml/2006/main" w="0">
             <a:noFill/>
             <a:prstDash val="solid"/>
           </a:ln>
         </p:spPr>
         <p:txBody>
-          <a:bodyPr xmlns:a="http://schemas.openxmlformats.org/drawingml/2006/main" lIns="114300" tIns="76200" rIns="114300" bIns="76200" anchor="ctr">
-            <a:normAutofit fontScale="97086"/>
+          <a:bodyPr xmlns:a="http://schemas.openxmlformats.org/drawingml/2006/main" lIns="0" tIns="0" rIns="0" bIns="0" anchor="ctr">
+            <a:normAutofit fontScale="100000"/>
           </a:bodyPr>
           <a:lstStyle xmlns:a="http://schemas.openxmlformats.org/drawingml/2006/main"/>
           <a:p xmlns:a="http://schemas.openxmlformats.org/drawingml/2006/main">
-            <a:pPr algn="l">
+            <a:pPr algn="ctr">
               <a:defRPr sz="1350" b="1">
                 <a:solidFill>
-                  <a:srgbClr val="FFFFFF"/>
+                  <a:srgbClr val="00A8D8"/>
                 </a:solidFill>
                 <a:latin typeface="Microsoft YaHei"/>
                 <a:ea typeface="Microsoft YaHei"/>
@@ -2373,7 +2608,7 @@
             <a:r>
               <a:rPr sz="1350" b="1">
                 <a:solidFill>
-                  <a:srgbClr val="FFFFFF"/>
+                  <a:srgbClr val="00A8D8"/>
                 </a:solidFill>
                 <a:latin typeface="Microsoft YaHei"/>
                 <a:ea typeface="Microsoft YaHei"/>
@@ -2386,10 +2621,10 @@
       </p:sp>
       <p:sp>
         <p:nvSpPr>
-          <p:cNvPr id="25" name="">
-            <a:extLst xmlns:a="http://schemas.openxmlformats.org/drawingml/2006/main">
-              <a:ext uri="{FF2B5EF4-FFF2-40B4-BE49-F238E27FC236}">
-                <a16:creationId xmlns:a16="http://schemas.microsoft.com/office/drawing/2014/main" id="{FDEADC07-7A43-4C0D-8FD9-09D5D5C7A788}"/>
+          <p:cNvPr id="32" name="PPAGENT_QA|parent=fishbone-item-3-0|domains=fishbone-items">
+            <a:extLst xmlns:a="http://schemas.openxmlformats.org/drawingml/2006/main">
+              <a:ext uri="{FF2B5EF4-FFF2-40B4-BE49-F238E27FC236}">
+                <a16:creationId xmlns:a16="http://schemas.microsoft.com/office/drawing/2014/main" id="{2C6BA0C8-F0D0-428D-B9B9-369529532148}"/>
               </a:ext>
             </a:extLst>
           </p:cNvPr>
@@ -2400,26 +2635,30 @@
         </p:nvSpPr>
         <p:spPr>
           <a:xfrm xmlns:a="http://schemas.openxmlformats.org/drawingml/2006/main">
-            <a:off x="4219575" y="4743450"/>
-            <a:ext cx="2000250" cy="742950"/>
-          </a:xfrm>
-          <a:prstGeom xmlns:a="http://schemas.openxmlformats.org/drawingml/2006/main" prst="rect">
-            <a:avLst/>
-          </a:prstGeom>
-          <a:noFill xmlns:a="http://schemas.openxmlformats.org/drawingml/2006/main"/>
-          <a:ln xmlns:a="http://schemas.openxmlformats.org/drawingml/2006/main" w="0">
-            <a:noFill/>
-            <a:prstDash val="solid"/>
-          </a:ln>
-        </p:spPr>
-        <p:txBody>
-          <a:bodyPr xmlns:a="http://schemas.openxmlformats.org/drawingml/2006/main" lIns="0" tIns="0" rIns="0" bIns="0" anchor="t">
+            <a:off x="3867150" y="4057650"/>
+            <a:ext cx="2019300" cy="266700"/>
+          </a:xfrm>
+          <a:prstGeom xmlns:a="http://schemas.openxmlformats.org/drawingml/2006/main" prst="parallelogram">
+            <a:avLst/>
+          </a:prstGeom>
+          <a:solidFill xmlns:a="http://schemas.openxmlformats.org/drawingml/2006/main">
+            <a:srgbClr val="F4F8FB"/>
+          </a:solidFill>
+          <a:ln xmlns:a="http://schemas.openxmlformats.org/drawingml/2006/main" w="9525">
+            <a:solidFill>
+              <a:srgbClr val="B9DCE8"/>
+            </a:solidFill>
+            <a:prstDash val="solid"/>
+          </a:ln>
+        </p:spPr>
+        <p:txBody>
+          <a:bodyPr xmlns:a="http://schemas.openxmlformats.org/drawingml/2006/main" lIns="114300" tIns="9525" rIns="114300" bIns="9525" anchor="ctr">
             <a:normAutofit fontScale="100000"/>
           </a:bodyPr>
           <a:lstStyle xmlns:a="http://schemas.openxmlformats.org/drawingml/2006/main"/>
           <a:p xmlns:a="http://schemas.openxmlformats.org/drawingml/2006/main">
-            <a:pPr algn="l">
-              <a:defRPr sz="1125" b="0">
+            <a:pPr algn="ctr">
+              <a:defRPr sz="1200" b="0">
                 <a:solidFill>
                   <a:srgbClr val="475569"/>
                 </a:solidFill>
@@ -2429,7 +2668,7 @@
               </a:defRPr>
             </a:pPr>
             <a:r>
-              <a:rPr sz="1125" b="0">
+              <a:rPr sz="1200" b="0">
                 <a:solidFill>
                   <a:srgbClr val="475569"/>
                 </a:solidFill>
@@ -2437,12 +2676,51 @@
                 <a:ea typeface="Microsoft YaHei"/>
                 <a:cs typeface="Microsoft YaHei"/>
               </a:rPr>
-              <a:t>• 预算受限</a:t>
+              <a:t>预算受限</a:t>
             </a:r>
           </a:p>
+        </p:txBody>
+      </p:sp>
+      <p:sp>
+        <p:nvSpPr>
+          <p:cNvPr id="33" name="PPAGENT_QA|parent=fishbone-item-3-1|domains=fishbone-items">
+            <a:extLst xmlns:a="http://schemas.openxmlformats.org/drawingml/2006/main">
+              <a:ext uri="{FF2B5EF4-FFF2-40B4-BE49-F238E27FC236}">
+                <a16:creationId xmlns:a16="http://schemas.microsoft.com/office/drawing/2014/main" id="{B145C93F-4F78-41FD-AD44-5891FB77376A}"/>
+              </a:ext>
+            </a:extLst>
+          </p:cNvPr>
+          <p:cNvSpPr>
+            <a:spLocks xmlns:a="http://schemas.openxmlformats.org/drawingml/2006/main" noGrp="1"/>
+          </p:cNvSpPr>
+          <p:nvPr/>
+        </p:nvSpPr>
+        <p:spPr>
+          <a:xfrm xmlns:a="http://schemas.openxmlformats.org/drawingml/2006/main">
+            <a:off x="3924300" y="4362450"/>
+            <a:ext cx="2019300" cy="266700"/>
+          </a:xfrm>
+          <a:prstGeom xmlns:a="http://schemas.openxmlformats.org/drawingml/2006/main" prst="parallelogram">
+            <a:avLst/>
+          </a:prstGeom>
+          <a:solidFill xmlns:a="http://schemas.openxmlformats.org/drawingml/2006/main">
+            <a:srgbClr val="F4F8FB"/>
+          </a:solidFill>
+          <a:ln xmlns:a="http://schemas.openxmlformats.org/drawingml/2006/main" w="9525">
+            <a:solidFill>
+              <a:srgbClr val="B9DCE8"/>
+            </a:solidFill>
+            <a:prstDash val="solid"/>
+          </a:ln>
+        </p:spPr>
+        <p:txBody>
+          <a:bodyPr xmlns:a="http://schemas.openxmlformats.org/drawingml/2006/main" lIns="114300" tIns="9525" rIns="114300" bIns="9525" anchor="ctr">
+            <a:normAutofit fontScale="100000"/>
+          </a:bodyPr>
+          <a:lstStyle xmlns:a="http://schemas.openxmlformats.org/drawingml/2006/main"/>
           <a:p xmlns:a="http://schemas.openxmlformats.org/drawingml/2006/main">
-            <a:pPr algn="l">
-              <a:defRPr sz="1125" b="0">
+            <a:pPr algn="ctr">
+              <a:defRPr sz="1200" b="0">
                 <a:solidFill>
                   <a:srgbClr val="475569"/>
                 </a:solidFill>
@@ -2452,7 +2730,7 @@
               </a:defRPr>
             </a:pPr>
             <a:r>
-              <a:rPr sz="1125" b="0">
+              <a:rPr sz="1200" b="0">
                 <a:solidFill>
                   <a:srgbClr val="475569"/>
                 </a:solidFill>
@@ -2460,12 +2738,51 @@
                 <a:ea typeface="Microsoft YaHei"/>
                 <a:cs typeface="Microsoft YaHei"/>
               </a:rPr>
-              <a:t>• 设备交付延迟</a:t>
+              <a:t>设备交付延迟</a:t>
             </a:r>
           </a:p>
+        </p:txBody>
+      </p:sp>
+      <p:sp>
+        <p:nvSpPr>
+          <p:cNvPr id="34" name="PPAGENT_QA|parent=fishbone-item-3-2|domains=fishbone-items">
+            <a:extLst xmlns:a="http://schemas.openxmlformats.org/drawingml/2006/main">
+              <a:ext uri="{FF2B5EF4-FFF2-40B4-BE49-F238E27FC236}">
+                <a16:creationId xmlns:a16="http://schemas.microsoft.com/office/drawing/2014/main" id="{FB27CA1B-5F35-491A-AD2D-D5C43B6220C7}"/>
+              </a:ext>
+            </a:extLst>
+          </p:cNvPr>
+          <p:cNvSpPr>
+            <a:spLocks xmlns:a="http://schemas.openxmlformats.org/drawingml/2006/main" noGrp="1"/>
+          </p:cNvSpPr>
+          <p:nvPr/>
+        </p:nvSpPr>
+        <p:spPr>
+          <a:xfrm xmlns:a="http://schemas.openxmlformats.org/drawingml/2006/main">
+            <a:off x="3981450" y="4667250"/>
+            <a:ext cx="2019300" cy="266700"/>
+          </a:xfrm>
+          <a:prstGeom xmlns:a="http://schemas.openxmlformats.org/drawingml/2006/main" prst="parallelogram">
+            <a:avLst/>
+          </a:prstGeom>
+          <a:solidFill xmlns:a="http://schemas.openxmlformats.org/drawingml/2006/main">
+            <a:srgbClr val="F4F8FB"/>
+          </a:solidFill>
+          <a:ln xmlns:a="http://schemas.openxmlformats.org/drawingml/2006/main" w="9525">
+            <a:solidFill>
+              <a:srgbClr val="B9DCE8"/>
+            </a:solidFill>
+            <a:prstDash val="solid"/>
+          </a:ln>
+        </p:spPr>
+        <p:txBody>
+          <a:bodyPr xmlns:a="http://schemas.openxmlformats.org/drawingml/2006/main" lIns="114300" tIns="9525" rIns="114300" bIns="9525" anchor="ctr">
+            <a:normAutofit fontScale="100000"/>
+          </a:bodyPr>
+          <a:lstStyle xmlns:a="http://schemas.openxmlformats.org/drawingml/2006/main"/>
           <a:p xmlns:a="http://schemas.openxmlformats.org/drawingml/2006/main">
-            <a:pPr algn="l">
-              <a:defRPr sz="1125" b="0">
+            <a:pPr algn="ctr">
+              <a:defRPr sz="1200" b="0">
                 <a:solidFill>
                   <a:srgbClr val="475569"/>
                 </a:solidFill>
@@ -2475,7 +2792,7 @@
               </a:defRPr>
             </a:pPr>
             <a:r>
-              <a:rPr sz="1125" b="0">
+              <a:rPr sz="1200" b="0">
                 <a:solidFill>
                   <a:srgbClr val="475569"/>
                 </a:solidFill>
@@ -2483,29 +2800,29 @@
                 <a:ea typeface="Microsoft YaHei"/>
                 <a:cs typeface="Microsoft YaHei"/>
               </a:rPr>
-              <a:t>• 外部支持不足</a:t>
+              <a:t>外部支持不足</a:t>
             </a:r>
           </a:p>
         </p:txBody>
       </p:sp>
       <p:sp>
         <p:nvSpPr>
-          <p:cNvPr id="26" name="">
-            <a:extLst xmlns:a="http://schemas.openxmlformats.org/drawingml/2006/main">
-              <a:ext uri="{FF2B5EF4-FFF2-40B4-BE49-F238E27FC236}">
-                <a16:creationId xmlns:a16="http://schemas.microsoft.com/office/drawing/2014/main" id="{D84D8AA7-EFF9-4F33-AEDE-A00800C0C51D}"/>
-              </a:ext>
-            </a:extLst>
-          </p:cNvPr>
-          <p:cNvSpPr>
-            <a:spLocks xmlns:a="http://schemas.openxmlformats.org/drawingml/2006/main" noGrp="1"/>
-          </p:cNvSpPr>
-          <p:nvPr/>
-        </p:nvSpPr>
-        <p:spPr>
-          <a:xfrm xmlns:a="http://schemas.openxmlformats.org/drawingml/2006/main" flipV="1">
-            <a:off x="7696200" y="3476625"/>
-            <a:ext cx="876300" cy="752475"/>
+          <p:cNvPr id="35" name="PPAGENT_CONNECTOR|from=fishbone-item-5-0|fromSide=top|to=fishbone-joint-5|toSide=center">
+            <a:extLst xmlns:a="http://schemas.openxmlformats.org/drawingml/2006/main">
+              <a:ext uri="{FF2B5EF4-FFF2-40B4-BE49-F238E27FC236}">
+                <a16:creationId xmlns:a16="http://schemas.microsoft.com/office/drawing/2014/main" id="{A8D70534-5EE9-4F3A-ACBD-3E573F0EF9BD}"/>
+              </a:ext>
+            </a:extLst>
+          </p:cNvPr>
+          <p:cNvSpPr>
+            <a:spLocks xmlns:a="http://schemas.openxmlformats.org/drawingml/2006/main" noGrp="1"/>
+          </p:cNvSpPr>
+          <p:nvPr/>
+        </p:nvSpPr>
+        <p:spPr>
+          <a:xfrm xmlns:a="http://schemas.openxmlformats.org/drawingml/2006/main" flipH="0" flipV="1">
+            <a:off x="7543800" y="3562350"/>
+            <a:ext cx="742950" cy="495300"/>
           </a:xfrm>
           <a:prstGeom xmlns:a="http://schemas.openxmlformats.org/drawingml/2006/main" prst="line">
             <a:avLst/>
@@ -2521,10 +2838,10 @@
       </p:sp>
       <p:sp>
         <p:nvSpPr>
-          <p:cNvPr id="27" name="">
-            <a:extLst xmlns:a="http://schemas.openxmlformats.org/drawingml/2006/main">
-              <a:ext uri="{FF2B5EF4-FFF2-40B4-BE49-F238E27FC236}">
-                <a16:creationId xmlns:a16="http://schemas.microsoft.com/office/drawing/2014/main" id="{245A697D-802D-4F7E-8FAB-EC7B4D00A64F}"/>
+          <p:cNvPr id="36" name="PPAGENT_QA|parent=fishbone-joint-5">
+            <a:extLst xmlns:a="http://schemas.openxmlformats.org/drawingml/2006/main">
+              <a:ext uri="{FF2B5EF4-FFF2-40B4-BE49-F238E27FC236}">
+                <a16:creationId xmlns:a16="http://schemas.microsoft.com/office/drawing/2014/main" id="{1E81FA4B-906F-40C5-B322-443976BC2150}"/>
               </a:ext>
             </a:extLst>
           </p:cNvPr>
@@ -2535,37 +2852,29 @@
         </p:nvSpPr>
         <p:spPr>
           <a:xfrm xmlns:a="http://schemas.openxmlformats.org/drawingml/2006/main">
-            <a:off x="6762750" y="4210050"/>
-            <a:ext cx="2343150" cy="1428750"/>
-          </a:xfrm>
-          <a:prstGeom xmlns:a="http://schemas.openxmlformats.org/drawingml/2006/main" prst="roundRect">
-            <a:avLst>
-              <a:gd name="adj" fmla="val 8000"/>
-            </a:avLst>
+            <a:off x="8210550" y="3486150"/>
+            <a:ext cx="152400" cy="152400"/>
+          </a:xfrm>
+          <a:prstGeom xmlns:a="http://schemas.openxmlformats.org/drawingml/2006/main" prst="ellipse">
+            <a:avLst/>
           </a:prstGeom>
           <a:solidFill xmlns:a="http://schemas.openxmlformats.org/drawingml/2006/main">
             <a:srgbClr val="FFFFFF"/>
           </a:solidFill>
-          <a:ln xmlns:a="http://schemas.openxmlformats.org/drawingml/2006/main" w="14288">
+          <a:ln xmlns:a="http://schemas.openxmlformats.org/drawingml/2006/main" w="19050">
             <a:solidFill>
               <a:srgbClr val="00A8D8"/>
             </a:solidFill>
             <a:prstDash val="solid"/>
           </a:ln>
         </p:spPr>
-        <p:style>
-          <a:lnRef xmlns:a="http://schemas.openxmlformats.org/drawingml/2006/main" idx="0"/>
-          <a:fillRef xmlns:a="http://schemas.openxmlformats.org/drawingml/2006/main" idx="0"/>
-          <a:effectRef xmlns:a="http://schemas.openxmlformats.org/drawingml/2006/main" idx="4"/>
-          <a:fontRef xmlns:a="http://schemas.openxmlformats.org/drawingml/2006/main" idx="major"/>
-        </p:style>
-      </p:sp>
-      <p:sp>
-        <p:nvSpPr>
-          <p:cNvPr id="28" name="">
-            <a:extLst xmlns:a="http://schemas.openxmlformats.org/drawingml/2006/main">
-              <a:ext uri="{FF2B5EF4-FFF2-40B4-BE49-F238E27FC236}">
-                <a16:creationId xmlns:a16="http://schemas.microsoft.com/office/drawing/2014/main" id="{246A9FCE-F249-49CE-B297-78E25F24B0B9}"/>
+      </p:sp>
+      <p:sp>
+        <p:nvSpPr>
+          <p:cNvPr id="37" name="">
+            <a:extLst xmlns:a="http://schemas.openxmlformats.org/drawingml/2006/main">
+              <a:ext uri="{FF2B5EF4-FFF2-40B4-BE49-F238E27FC236}">
+                <a16:creationId xmlns:a16="http://schemas.microsoft.com/office/drawing/2014/main" id="{0626FE51-6B68-430D-B124-955293A413E0}"/>
               </a:ext>
             </a:extLst>
           </p:cNvPr>
@@ -2576,32 +2885,28 @@
         </p:nvSpPr>
         <p:spPr>
           <a:xfrm xmlns:a="http://schemas.openxmlformats.org/drawingml/2006/main">
-            <a:off x="6762750" y="4210050"/>
-            <a:ext cx="2343150" cy="419100"/>
-          </a:xfrm>
-          <a:prstGeom xmlns:a="http://schemas.openxmlformats.org/drawingml/2006/main" prst="roundRect">
-            <a:avLst>
-              <a:gd name="adj" fmla="val 27273"/>
-            </a:avLst>
-          </a:prstGeom>
-          <a:solidFill xmlns:a="http://schemas.openxmlformats.org/drawingml/2006/main">
-            <a:srgbClr val="00A8D8"/>
-          </a:solidFill>
+            <a:off x="6591300" y="5029200"/>
+            <a:ext cx="2095500" cy="285750"/>
+          </a:xfrm>
+          <a:prstGeom xmlns:a="http://schemas.openxmlformats.org/drawingml/2006/main" prst="rect">
+            <a:avLst/>
+          </a:prstGeom>
+          <a:noFill xmlns:a="http://schemas.openxmlformats.org/drawingml/2006/main"/>
           <a:ln xmlns:a="http://schemas.openxmlformats.org/drawingml/2006/main" w="0">
             <a:noFill/>
             <a:prstDash val="solid"/>
           </a:ln>
         </p:spPr>
         <p:txBody>
-          <a:bodyPr xmlns:a="http://schemas.openxmlformats.org/drawingml/2006/main" lIns="114300" tIns="76200" rIns="114300" bIns="76200" anchor="ctr">
-            <a:normAutofit fontScale="97086"/>
+          <a:bodyPr xmlns:a="http://schemas.openxmlformats.org/drawingml/2006/main" lIns="0" tIns="0" rIns="0" bIns="0" anchor="ctr">
+            <a:normAutofit fontScale="100000"/>
           </a:bodyPr>
           <a:lstStyle xmlns:a="http://schemas.openxmlformats.org/drawingml/2006/main"/>
           <a:p xmlns:a="http://schemas.openxmlformats.org/drawingml/2006/main">
-            <a:pPr algn="l">
+            <a:pPr algn="ctr">
               <a:defRPr sz="1350" b="1">
                 <a:solidFill>
-                  <a:srgbClr val="FFFFFF"/>
+                  <a:srgbClr val="00A8D8"/>
                 </a:solidFill>
                 <a:latin typeface="Microsoft YaHei"/>
                 <a:ea typeface="Microsoft YaHei"/>
@@ -2611,7 +2916,7 @@
             <a:r>
               <a:rPr sz="1350" b="1">
                 <a:solidFill>
-                  <a:srgbClr val="FFFFFF"/>
+                  <a:srgbClr val="00A8D8"/>
                 </a:solidFill>
                 <a:latin typeface="Microsoft YaHei"/>
                 <a:ea typeface="Microsoft YaHei"/>
@@ -2624,10 +2929,10 @@
       </p:sp>
       <p:sp>
         <p:nvSpPr>
-          <p:cNvPr id="29" name="">
-            <a:extLst xmlns:a="http://schemas.openxmlformats.org/drawingml/2006/main">
-              <a:ext uri="{FF2B5EF4-FFF2-40B4-BE49-F238E27FC236}">
-                <a16:creationId xmlns:a16="http://schemas.microsoft.com/office/drawing/2014/main" id="{04CB7577-4306-4A1A-B750-5E80C86F4E8D}"/>
+          <p:cNvPr id="38" name="PPAGENT_QA|parent=fishbone-item-5-0|domains=fishbone-items">
+            <a:extLst xmlns:a="http://schemas.openxmlformats.org/drawingml/2006/main">
+              <a:ext uri="{FF2B5EF4-FFF2-40B4-BE49-F238E27FC236}">
+                <a16:creationId xmlns:a16="http://schemas.microsoft.com/office/drawing/2014/main" id="{19755C56-2146-4753-A2B4-240569324CDD}"/>
               </a:ext>
             </a:extLst>
           </p:cNvPr>
@@ -2638,26 +2943,30 @@
         </p:nvSpPr>
         <p:spPr>
           <a:xfrm xmlns:a="http://schemas.openxmlformats.org/drawingml/2006/main">
-            <a:off x="6934200" y="4743450"/>
-            <a:ext cx="2000250" cy="742950"/>
-          </a:xfrm>
-          <a:prstGeom xmlns:a="http://schemas.openxmlformats.org/drawingml/2006/main" prst="rect">
-            <a:avLst/>
-          </a:prstGeom>
-          <a:noFill xmlns:a="http://schemas.openxmlformats.org/drawingml/2006/main"/>
-          <a:ln xmlns:a="http://schemas.openxmlformats.org/drawingml/2006/main" w="0">
-            <a:noFill/>
-            <a:prstDash val="solid"/>
-          </a:ln>
-        </p:spPr>
-        <p:txBody>
-          <a:bodyPr xmlns:a="http://schemas.openxmlformats.org/drawingml/2006/main" lIns="0" tIns="0" rIns="0" bIns="0" anchor="t">
+            <a:off x="6534150" y="4057650"/>
+            <a:ext cx="2019300" cy="266700"/>
+          </a:xfrm>
+          <a:prstGeom xmlns:a="http://schemas.openxmlformats.org/drawingml/2006/main" prst="parallelogram">
+            <a:avLst/>
+          </a:prstGeom>
+          <a:solidFill xmlns:a="http://schemas.openxmlformats.org/drawingml/2006/main">
+            <a:srgbClr val="F4F8FB"/>
+          </a:solidFill>
+          <a:ln xmlns:a="http://schemas.openxmlformats.org/drawingml/2006/main" w="9525">
+            <a:solidFill>
+              <a:srgbClr val="B9DCE8"/>
+            </a:solidFill>
+            <a:prstDash val="solid"/>
+          </a:ln>
+        </p:spPr>
+        <p:txBody>
+          <a:bodyPr xmlns:a="http://schemas.openxmlformats.org/drawingml/2006/main" lIns="114300" tIns="9525" rIns="114300" bIns="9525" anchor="ctr">
             <a:normAutofit fontScale="100000"/>
           </a:bodyPr>
           <a:lstStyle xmlns:a="http://schemas.openxmlformats.org/drawingml/2006/main"/>
           <a:p xmlns:a="http://schemas.openxmlformats.org/drawingml/2006/main">
-            <a:pPr algn="l">
-              <a:defRPr sz="1125" b="0">
+            <a:pPr algn="ctr">
+              <a:defRPr sz="1200" b="0">
                 <a:solidFill>
                   <a:srgbClr val="475569"/>
                 </a:solidFill>
@@ -2667,7 +2976,7 @@
               </a:defRPr>
             </a:pPr>
             <a:r>
-              <a:rPr sz="1125" b="0">
+              <a:rPr sz="1200" b="0">
                 <a:solidFill>
                   <a:srgbClr val="475569"/>
                 </a:solidFill>
@@ -2675,12 +2984,51 @@
                 <a:ea typeface="Microsoft YaHei"/>
                 <a:cs typeface="Microsoft YaHei"/>
               </a:rPr>
-              <a:t>• 供应链波动</a:t>
+              <a:t>供应链波动</a:t>
             </a:r>
           </a:p>
+        </p:txBody>
+      </p:sp>
+      <p:sp>
+        <p:nvSpPr>
+          <p:cNvPr id="39" name="PPAGENT_QA|parent=fishbone-item-5-1|domains=fishbone-items">
+            <a:extLst xmlns:a="http://schemas.openxmlformats.org/drawingml/2006/main">
+              <a:ext uri="{FF2B5EF4-FFF2-40B4-BE49-F238E27FC236}">
+                <a16:creationId xmlns:a16="http://schemas.microsoft.com/office/drawing/2014/main" id="{591726C4-AEF2-4B4E-ACBD-37CB66D2CF37}"/>
+              </a:ext>
+            </a:extLst>
+          </p:cNvPr>
+          <p:cNvSpPr>
+            <a:spLocks xmlns:a="http://schemas.openxmlformats.org/drawingml/2006/main" noGrp="1"/>
+          </p:cNvSpPr>
+          <p:nvPr/>
+        </p:nvSpPr>
+        <p:spPr>
+          <a:xfrm xmlns:a="http://schemas.openxmlformats.org/drawingml/2006/main">
+            <a:off x="6591300" y="4362450"/>
+            <a:ext cx="2019300" cy="266700"/>
+          </a:xfrm>
+          <a:prstGeom xmlns:a="http://schemas.openxmlformats.org/drawingml/2006/main" prst="parallelogram">
+            <a:avLst/>
+          </a:prstGeom>
+          <a:solidFill xmlns:a="http://schemas.openxmlformats.org/drawingml/2006/main">
+            <a:srgbClr val="F4F8FB"/>
+          </a:solidFill>
+          <a:ln xmlns:a="http://schemas.openxmlformats.org/drawingml/2006/main" w="9525">
+            <a:solidFill>
+              <a:srgbClr val="B9DCE8"/>
+            </a:solidFill>
+            <a:prstDash val="solid"/>
+          </a:ln>
+        </p:spPr>
+        <p:txBody>
+          <a:bodyPr xmlns:a="http://schemas.openxmlformats.org/drawingml/2006/main" lIns="114300" tIns="9525" rIns="114300" bIns="9525" anchor="ctr">
+            <a:normAutofit fontScale="100000"/>
+          </a:bodyPr>
+          <a:lstStyle xmlns:a="http://schemas.openxmlformats.org/drawingml/2006/main"/>
           <a:p xmlns:a="http://schemas.openxmlformats.org/drawingml/2006/main">
-            <a:pPr algn="l">
-              <a:defRPr sz="1125" b="0">
+            <a:pPr algn="ctr">
+              <a:defRPr sz="1200" b="0">
                 <a:solidFill>
                   <a:srgbClr val="475569"/>
                 </a:solidFill>
@@ -2690,7 +3038,7 @@
               </a:defRPr>
             </a:pPr>
             <a:r>
-              <a:rPr sz="1125" b="0">
+              <a:rPr sz="1200" b="0">
                 <a:solidFill>
                   <a:srgbClr val="475569"/>
                 </a:solidFill>
@@ -2698,12 +3046,51 @@
                 <a:ea typeface="Microsoft YaHei"/>
                 <a:cs typeface="Microsoft YaHei"/>
               </a:rPr>
-              <a:t>• 政策窗口变化</a:t>
+              <a:t>政策窗口变化</a:t>
             </a:r>
           </a:p>
+        </p:txBody>
+      </p:sp>
+      <p:sp>
+        <p:nvSpPr>
+          <p:cNvPr id="40" name="PPAGENT_QA|parent=fishbone-item-5-2|domains=fishbone-items">
+            <a:extLst xmlns:a="http://schemas.openxmlformats.org/drawingml/2006/main">
+              <a:ext uri="{FF2B5EF4-FFF2-40B4-BE49-F238E27FC236}">
+                <a16:creationId xmlns:a16="http://schemas.microsoft.com/office/drawing/2014/main" id="{17210B97-492C-48B2-982E-DCAC0BBD347E}"/>
+              </a:ext>
+            </a:extLst>
+          </p:cNvPr>
+          <p:cNvSpPr>
+            <a:spLocks xmlns:a="http://schemas.openxmlformats.org/drawingml/2006/main" noGrp="1"/>
+          </p:cNvSpPr>
+          <p:nvPr/>
+        </p:nvSpPr>
+        <p:spPr>
+          <a:xfrm xmlns:a="http://schemas.openxmlformats.org/drawingml/2006/main">
+            <a:off x="6648450" y="4667250"/>
+            <a:ext cx="2019300" cy="266700"/>
+          </a:xfrm>
+          <a:prstGeom xmlns:a="http://schemas.openxmlformats.org/drawingml/2006/main" prst="parallelogram">
+            <a:avLst/>
+          </a:prstGeom>
+          <a:solidFill xmlns:a="http://schemas.openxmlformats.org/drawingml/2006/main">
+            <a:srgbClr val="F4F8FB"/>
+          </a:solidFill>
+          <a:ln xmlns:a="http://schemas.openxmlformats.org/drawingml/2006/main" w="9525">
+            <a:solidFill>
+              <a:srgbClr val="B9DCE8"/>
+            </a:solidFill>
+            <a:prstDash val="solid"/>
+          </a:ln>
+        </p:spPr>
+        <p:txBody>
+          <a:bodyPr xmlns:a="http://schemas.openxmlformats.org/drawingml/2006/main" lIns="114300" tIns="9525" rIns="114300" bIns="9525" anchor="ctr">
+            <a:normAutofit fontScale="100000"/>
+          </a:bodyPr>
+          <a:lstStyle xmlns:a="http://schemas.openxmlformats.org/drawingml/2006/main"/>
           <a:p xmlns:a="http://schemas.openxmlformats.org/drawingml/2006/main">
-            <a:pPr algn="l">
-              <a:defRPr sz="1125" b="0">
+            <a:pPr algn="ctr">
+              <a:defRPr sz="1200" b="0">
                 <a:solidFill>
                   <a:srgbClr val="475569"/>
                 </a:solidFill>
@@ -2713,7 +3100,7 @@
               </a:defRPr>
             </a:pPr>
             <a:r>
-              <a:rPr sz="1125" b="0">
+              <a:rPr sz="1200" b="0">
                 <a:solidFill>
                   <a:srgbClr val="475569"/>
                 </a:solidFill>
@@ -2721,7 +3108,7 @@
                 <a:ea typeface="Microsoft YaHei"/>
                 <a:cs typeface="Microsoft YaHei"/>
               </a:rPr>
-              <a:t>• 跨区域协作困难</a:t>
+              <a:t>跨区域协作困难</a:t>
             </a:r>
           </a:p>
         </p:txBody>
@@ -2729,7 +3116,7 @@
     </p:spTree>
     <p:extLst>
       <p:ext uri="{BB962C8B-B14F-4D97-AF65-F5344CB8AC3E}">
-        <p14:creationId xmlns:p14="http://schemas.microsoft.com/office/powerpoint/2010/main" val="813499414"/>
+        <p14:creationId xmlns:p14="http://schemas.microsoft.com/office/powerpoint/2010/main" val="1789587896"/>
       </p:ext>
     </p:extLst>
   </p:cSld>
